--- a/Week_7/Integrations.pptx
+++ b/Week_7/Integrations.pptx
@@ -5,7 +5,7 @@
     <p:sldMasterId id="2147483684" r:id="rId1"/>
   </p:sldMasterIdLst>
   <p:notesMasterIdLst>
-    <p:notesMasterId r:id="rId22"/>
+    <p:notesMasterId r:id="rId23"/>
   </p:notesMasterIdLst>
   <p:sldIdLst>
     <p:sldId id="380" r:id="rId2"/>
@@ -15,19 +15,20 @@
     <p:sldId id="435" r:id="rId6"/>
     <p:sldId id="425" r:id="rId7"/>
     <p:sldId id="436" r:id="rId8"/>
-    <p:sldId id="437" r:id="rId9"/>
-    <p:sldId id="424" r:id="rId10"/>
-    <p:sldId id="438" r:id="rId11"/>
-    <p:sldId id="422" r:id="rId12"/>
-    <p:sldId id="426" r:id="rId13"/>
-    <p:sldId id="428" r:id="rId14"/>
-    <p:sldId id="429" r:id="rId15"/>
-    <p:sldId id="430" r:id="rId16"/>
-    <p:sldId id="431" r:id="rId17"/>
-    <p:sldId id="433" r:id="rId18"/>
-    <p:sldId id="434" r:id="rId19"/>
-    <p:sldId id="427" r:id="rId20"/>
-    <p:sldId id="432" r:id="rId21"/>
+    <p:sldId id="439" r:id="rId9"/>
+    <p:sldId id="437" r:id="rId10"/>
+    <p:sldId id="424" r:id="rId11"/>
+    <p:sldId id="438" r:id="rId12"/>
+    <p:sldId id="422" r:id="rId13"/>
+    <p:sldId id="426" r:id="rId14"/>
+    <p:sldId id="428" r:id="rId15"/>
+    <p:sldId id="429" r:id="rId16"/>
+    <p:sldId id="430" r:id="rId17"/>
+    <p:sldId id="431" r:id="rId18"/>
+    <p:sldId id="433" r:id="rId19"/>
+    <p:sldId id="434" r:id="rId20"/>
+    <p:sldId id="427" r:id="rId21"/>
+    <p:sldId id="432" r:id="rId22"/>
   </p:sldIdLst>
   <p:sldSz cx="12192000" cy="6858000"/>
   <p:notesSz cx="6858000" cy="9144000"/>
@@ -584,7 +585,7 @@
           <a:p>
             <a:fld id="{36C040E7-12E1-4E9C-B024-3505840C3DA3}" type="slidenum">
               <a:rPr lang="en-US" smtClean="0"/>
-              <a:t>8</a:t>
+              <a:t>9</a:t>
             </a:fld>
             <a:endParaRPr lang="en-US"/>
           </a:p>
@@ -695,7 +696,7 @@
           <a:p>
             <a:fld id="{36C040E7-12E1-4E9C-B024-3505840C3DA3}" type="slidenum">
               <a:rPr lang="en-US" smtClean="0"/>
-              <a:t>10</a:t>
+              <a:t>11</a:t>
             </a:fld>
             <a:endParaRPr lang="en-US"/>
           </a:p>
@@ -4577,6 +4578,174 @@
   <p:cSld>
     <p:spTree>
       <p:nvGrpSpPr>
+        <p:cNvPr id="1" name=""/>
+        <p:cNvGrpSpPr/>
+        <p:nvPr/>
+      </p:nvGrpSpPr>
+      <p:grpSpPr>
+        <a:xfrm>
+          <a:off x="0" y="0"/>
+          <a:ext cx="0" cy="0"/>
+          <a:chOff x="0" y="0"/>
+          <a:chExt cx="0" cy="0"/>
+        </a:xfrm>
+      </p:grpSpPr>
+      <p:sp>
+        <p:nvSpPr>
+          <p:cNvPr id="2" name="Title 1">
+            <a:extLst>
+              <a:ext uri="{FF2B5EF4-FFF2-40B4-BE49-F238E27FC236}">
+                <a16:creationId xmlns:a16="http://schemas.microsoft.com/office/drawing/2014/main" id="{F0A3B712-7B9A-FC09-C8C1-F468C2F35495}"/>
+              </a:ext>
+            </a:extLst>
+          </p:cNvPr>
+          <p:cNvSpPr>
+            <a:spLocks noGrp="1"/>
+          </p:cNvSpPr>
+          <p:nvPr>
+            <p:ph type="title"/>
+          </p:nvPr>
+        </p:nvSpPr>
+        <p:spPr/>
+        <p:txBody>
+          <a:bodyPr/>
+          <a:lstStyle/>
+          <a:p>
+            <a:r>
+              <a:rPr lang="en-US" dirty="0" err="1"/>
+              <a:t>IntegrationHub</a:t>
+            </a:r>
+            <a:r>
+              <a:rPr lang="en-US" dirty="0"/>
+              <a:t> Enterprise License - REST API Trigger</a:t>
+            </a:r>
+          </a:p>
+        </p:txBody>
+      </p:sp>
+      <p:pic>
+        <p:nvPicPr>
+          <p:cNvPr id="5" name="Picture 4">
+            <a:extLst>
+              <a:ext uri="{FF2B5EF4-FFF2-40B4-BE49-F238E27FC236}">
+                <a16:creationId xmlns:a16="http://schemas.microsoft.com/office/drawing/2014/main" id="{7A9C53E6-7E2C-620C-C11D-DDE603E1E587}"/>
+              </a:ext>
+            </a:extLst>
+          </p:cNvPr>
+          <p:cNvPicPr>
+            <a:picLocks noChangeAspect="1"/>
+          </p:cNvPicPr>
+          <p:nvPr/>
+        </p:nvPicPr>
+        <p:blipFill>
+          <a:blip r:embed="rId2"/>
+          <a:stretch>
+            <a:fillRect/>
+          </a:stretch>
+        </p:blipFill>
+        <p:spPr>
+          <a:xfrm>
+            <a:off x="3676967" y="2111829"/>
+            <a:ext cx="8221118" cy="4306300"/>
+          </a:xfrm>
+          <a:prstGeom prst="rect">
+            <a:avLst/>
+          </a:prstGeom>
+        </p:spPr>
+      </p:pic>
+      <p:sp>
+        <p:nvSpPr>
+          <p:cNvPr id="6" name="TextBox 5">
+            <a:extLst>
+              <a:ext uri="{FF2B5EF4-FFF2-40B4-BE49-F238E27FC236}">
+                <a16:creationId xmlns:a16="http://schemas.microsoft.com/office/drawing/2014/main" id="{60726007-289D-54DD-7CCD-1B23C8EB48D5}"/>
+              </a:ext>
+            </a:extLst>
+          </p:cNvPr>
+          <p:cNvSpPr txBox="1"/>
+          <p:nvPr/>
+        </p:nvSpPr>
+        <p:spPr>
+          <a:xfrm>
+            <a:off x="457200" y="2778501"/>
+            <a:ext cx="2950029" cy="1754326"/>
+          </a:xfrm>
+          <a:prstGeom prst="rect">
+            <a:avLst/>
+          </a:prstGeom>
+          <a:noFill/>
+        </p:spPr>
+        <p:txBody>
+          <a:bodyPr wrap="square" rtlCol="0">
+            <a:spAutoFit/>
+          </a:bodyPr>
+          <a:lstStyle/>
+          <a:p>
+            <a:pPr marL="285750" indent="-285750">
+              <a:buClr>
+                <a:schemeClr val="accent2"/>
+              </a:buClr>
+              <a:buFont typeface="Wingdings" panose="05000000000000000000" pitchFamily="2" charset="2"/>
+              <a:buChar char="§"/>
+            </a:pPr>
+            <a:r>
+              <a:rPr lang="en-US" dirty="0"/>
+              <a:t>Requires </a:t>
+            </a:r>
+            <a:r>
+              <a:rPr lang="en-US" dirty="0" err="1"/>
+              <a:t>IntegrationHub</a:t>
+            </a:r>
+            <a:r>
+              <a:rPr lang="en-US" dirty="0"/>
+              <a:t> Enterprise License</a:t>
+            </a:r>
+          </a:p>
+          <a:p>
+            <a:pPr marL="742950" lvl="1" indent="-285750">
+              <a:buClr>
+                <a:schemeClr val="accent2"/>
+              </a:buClr>
+              <a:buFont typeface="Wingdings" panose="05000000000000000000" pitchFamily="2" charset="2"/>
+              <a:buChar char="§"/>
+            </a:pPr>
+            <a:r>
+              <a:rPr lang="en-US" dirty="0"/>
+              <a:t>Install from developer site for PDIs</a:t>
+            </a:r>
+          </a:p>
+          <a:p>
+            <a:pPr marL="285750" indent="-285750">
+              <a:buClr>
+                <a:schemeClr val="accent2"/>
+              </a:buClr>
+              <a:buFont typeface="Wingdings" panose="05000000000000000000" pitchFamily="2" charset="2"/>
+              <a:buChar char="§"/>
+            </a:pPr>
+            <a:r>
+              <a:rPr lang="en-US" dirty="0"/>
+              <a:t>Launch Flows from a REST request</a:t>
+            </a:r>
+          </a:p>
+        </p:txBody>
+      </p:sp>
+    </p:spTree>
+    <p:extLst>
+      <p:ext uri="{BB962C8B-B14F-4D97-AF65-F5344CB8AC3E}">
+        <p14:creationId xmlns:p14="http://schemas.microsoft.com/office/powerpoint/2010/main" val="1486957363"/>
+      </p:ext>
+    </p:extLst>
+  </p:cSld>
+  <p:clrMapOvr>
+    <a:masterClrMapping/>
+  </p:clrMapOvr>
+</p:sld>
+</file>
+
+<file path=ppt/slides/slide11.xml><?xml version="1.0" encoding="utf-8"?>
+<p:sld xmlns:a="http://schemas.openxmlformats.org/drawingml/2006/main" xmlns:r="http://schemas.openxmlformats.org/officeDocument/2006/relationships" xmlns:p="http://schemas.openxmlformats.org/presentationml/2006/main">
+  <p:cSld>
+    <p:spTree>
+      <p:nvGrpSpPr>
         <p:cNvPr id="1" name="">
           <a:extLst>
             <a:ext uri="{FF2B5EF4-FFF2-40B4-BE49-F238E27FC236}">
@@ -4967,7 +5136,7 @@
 </p:sld>
 </file>
 
-<file path=ppt/slides/slide11.xml><?xml version="1.0" encoding="utf-8"?>
+<file path=ppt/slides/slide12.xml><?xml version="1.0" encoding="utf-8"?>
 <p:sld xmlns:a="http://schemas.openxmlformats.org/drawingml/2006/main" xmlns:r="http://schemas.openxmlformats.org/officeDocument/2006/relationships" xmlns:p="http://schemas.openxmlformats.org/presentationml/2006/main">
   <p:cSld>
     <p:spTree>
@@ -5161,207 +5330,6 @@
     <p:extLst>
       <p:ext uri="{BB962C8B-B14F-4D97-AF65-F5344CB8AC3E}">
         <p14:creationId xmlns:p14="http://schemas.microsoft.com/office/powerpoint/2010/main" val="1203343617"/>
-      </p:ext>
-    </p:extLst>
-  </p:cSld>
-  <p:clrMapOvr>
-    <a:masterClrMapping/>
-  </p:clrMapOvr>
-</p:sld>
-</file>
-
-<file path=ppt/slides/slide12.xml><?xml version="1.0" encoding="utf-8"?>
-<p:sld xmlns:a="http://schemas.openxmlformats.org/drawingml/2006/main" xmlns:r="http://schemas.openxmlformats.org/officeDocument/2006/relationships" xmlns:p="http://schemas.openxmlformats.org/presentationml/2006/main">
-  <p:cSld>
-    <p:spTree>
-      <p:nvGrpSpPr>
-        <p:cNvPr id="1" name=""/>
-        <p:cNvGrpSpPr/>
-        <p:nvPr/>
-      </p:nvGrpSpPr>
-      <p:grpSpPr>
-        <a:xfrm>
-          <a:off x="0" y="0"/>
-          <a:ext cx="0" cy="0"/>
-          <a:chOff x="0" y="0"/>
-          <a:chExt cx="0" cy="0"/>
-        </a:xfrm>
-      </p:grpSpPr>
-      <p:sp>
-        <p:nvSpPr>
-          <p:cNvPr id="2" name="Title 1">
-            <a:extLst>
-              <a:ext uri="{FF2B5EF4-FFF2-40B4-BE49-F238E27FC236}">
-                <a16:creationId xmlns:a16="http://schemas.microsoft.com/office/drawing/2014/main" id="{62F8E140-D467-0DB7-75DB-C3E40DC8BAFE}"/>
-              </a:ext>
-            </a:extLst>
-          </p:cNvPr>
-          <p:cNvSpPr>
-            <a:spLocks noGrp="1"/>
-          </p:cNvSpPr>
-          <p:nvPr>
-            <p:ph type="title"/>
-          </p:nvPr>
-        </p:nvSpPr>
-        <p:spPr/>
-        <p:txBody>
-          <a:bodyPr/>
-          <a:lstStyle/>
-          <a:p>
-            <a:r>
-              <a:rPr lang="en-US" dirty="0"/>
-              <a:t>Application Registry &amp; </a:t>
-            </a:r>
-            <a:r>
-              <a:rPr lang="en-US" dirty="0" err="1"/>
-              <a:t>Oauth</a:t>
-            </a:r>
-            <a:r>
-              <a:rPr lang="en-US" dirty="0"/>
-              <a:t> Grant Types</a:t>
-            </a:r>
-          </a:p>
-        </p:txBody>
-      </p:sp>
-      <p:sp>
-        <p:nvSpPr>
-          <p:cNvPr id="3" name="Content Placeholder 2">
-            <a:extLst>
-              <a:ext uri="{FF2B5EF4-FFF2-40B4-BE49-F238E27FC236}">
-                <a16:creationId xmlns:a16="http://schemas.microsoft.com/office/drawing/2014/main" id="{A2E78EDF-D99E-D251-5865-64C152DA4B13}"/>
-              </a:ext>
-            </a:extLst>
-          </p:cNvPr>
-          <p:cNvSpPr>
-            <a:spLocks noGrp="1"/>
-          </p:cNvSpPr>
-          <p:nvPr>
-            <p:ph idx="1"/>
-          </p:nvPr>
-        </p:nvSpPr>
-        <p:spPr>
-          <a:xfrm>
-            <a:off x="861111" y="2584719"/>
-            <a:ext cx="3881951" cy="3678303"/>
-          </a:xfrm>
-        </p:spPr>
-        <p:txBody>
-          <a:bodyPr/>
-          <a:lstStyle/>
-          <a:p>
-            <a:r>
-              <a:rPr lang="en-US" dirty="0"/>
-              <a:t>Application Registries define how external system may authenticate with our instance</a:t>
-            </a:r>
-          </a:p>
-          <a:p>
-            <a:r>
-              <a:rPr lang="en-US" dirty="0"/>
-              <a:t>Authorization – directs user to instance for login; respects user ACLs</a:t>
-            </a:r>
-          </a:p>
-          <a:p>
-            <a:r>
-              <a:rPr lang="en-US" dirty="0"/>
-              <a:t>Client credentials – allows us to get an access token with only the client secret and ID; usually used for machine-to-machine communication</a:t>
-            </a:r>
-          </a:p>
-        </p:txBody>
-      </p:sp>
-      <p:pic>
-        <p:nvPicPr>
-          <p:cNvPr id="5" name="Picture 4">
-            <a:extLst>
-              <a:ext uri="{FF2B5EF4-FFF2-40B4-BE49-F238E27FC236}">
-                <a16:creationId xmlns:a16="http://schemas.microsoft.com/office/drawing/2014/main" id="{97CCA791-75EA-373D-0E12-7A4DE628E378}"/>
-              </a:ext>
-            </a:extLst>
-          </p:cNvPr>
-          <p:cNvPicPr>
-            <a:picLocks noChangeAspect="1"/>
-          </p:cNvPicPr>
-          <p:nvPr/>
-        </p:nvPicPr>
-        <p:blipFill>
-          <a:blip r:embed="rId2"/>
-          <a:stretch>
-            <a:fillRect/>
-          </a:stretch>
-        </p:blipFill>
-        <p:spPr>
-          <a:xfrm>
-            <a:off x="4933819" y="1965508"/>
-            <a:ext cx="1867161" cy="619211"/>
-          </a:xfrm>
-          <a:prstGeom prst="rect">
-            <a:avLst/>
-          </a:prstGeom>
-        </p:spPr>
-      </p:pic>
-      <p:pic>
-        <p:nvPicPr>
-          <p:cNvPr id="7" name="Picture 6">
-            <a:extLst>
-              <a:ext uri="{FF2B5EF4-FFF2-40B4-BE49-F238E27FC236}">
-                <a16:creationId xmlns:a16="http://schemas.microsoft.com/office/drawing/2014/main" id="{2C499323-160E-BA1B-49C2-2D637E56ADC0}"/>
-              </a:ext>
-            </a:extLst>
-          </p:cNvPr>
-          <p:cNvPicPr>
-            <a:picLocks noChangeAspect="1"/>
-          </p:cNvPicPr>
-          <p:nvPr/>
-        </p:nvPicPr>
-        <p:blipFill>
-          <a:blip r:embed="rId3"/>
-          <a:stretch>
-            <a:fillRect/>
-          </a:stretch>
-        </p:blipFill>
-        <p:spPr>
-          <a:xfrm>
-            <a:off x="8210442" y="2075060"/>
-            <a:ext cx="1562318" cy="400106"/>
-          </a:xfrm>
-          <a:prstGeom prst="rect">
-            <a:avLst/>
-          </a:prstGeom>
-        </p:spPr>
-      </p:pic>
-      <p:pic>
-        <p:nvPicPr>
-          <p:cNvPr id="9" name="Picture 8">
-            <a:extLst>
-              <a:ext uri="{FF2B5EF4-FFF2-40B4-BE49-F238E27FC236}">
-                <a16:creationId xmlns:a16="http://schemas.microsoft.com/office/drawing/2014/main" id="{3D3A0AD7-2CD8-4236-BAC4-36B5654935E2}"/>
-              </a:ext>
-            </a:extLst>
-          </p:cNvPr>
-          <p:cNvPicPr>
-            <a:picLocks noChangeAspect="1"/>
-          </p:cNvPicPr>
-          <p:nvPr/>
-        </p:nvPicPr>
-        <p:blipFill>
-          <a:blip r:embed="rId4"/>
-          <a:stretch>
-            <a:fillRect/>
-          </a:stretch>
-        </p:blipFill>
-        <p:spPr>
-          <a:xfrm>
-            <a:off x="6096000" y="2993583"/>
-            <a:ext cx="3774731" cy="3451183"/>
-          </a:xfrm>
-          <a:prstGeom prst="rect">
-            <a:avLst/>
-          </a:prstGeom>
-        </p:spPr>
-      </p:pic>
-    </p:spTree>
-    <p:extLst>
-      <p:ext uri="{BB962C8B-B14F-4D97-AF65-F5344CB8AC3E}">
-        <p14:creationId xmlns:p14="http://schemas.microsoft.com/office/powerpoint/2010/main" val="2557188315"/>
       </p:ext>
     </p:extLst>
   </p:cSld>
@@ -5393,7 +5361,7 @@
           <p:cNvPr id="2" name="Title 1">
             <a:extLst>
               <a:ext uri="{FF2B5EF4-FFF2-40B4-BE49-F238E27FC236}">
-                <a16:creationId xmlns:a16="http://schemas.microsoft.com/office/drawing/2014/main" id="{64B84DD7-AD9C-351C-4447-0A988085BD9C}"/>
+                <a16:creationId xmlns:a16="http://schemas.microsoft.com/office/drawing/2014/main" id="{62F8E140-D467-0DB7-75DB-C3E40DC8BAFE}"/>
               </a:ext>
             </a:extLst>
           </p:cNvPr>
@@ -5411,7 +5379,15 @@
           <a:p>
             <a:r>
               <a:rPr lang="en-US" dirty="0"/>
-              <a:t>Proof Key for Code Exchange</a:t>
+              <a:t>Application Registry &amp; </a:t>
+            </a:r>
+            <a:r>
+              <a:rPr lang="en-US" dirty="0" err="1"/>
+              <a:t>Oauth</a:t>
+            </a:r>
+            <a:r>
+              <a:rPr lang="en-US" dirty="0"/>
+              <a:t> Grant Types</a:t>
             </a:r>
           </a:p>
         </p:txBody>
@@ -5421,7 +5397,7 @@
           <p:cNvPr id="3" name="Content Placeholder 2">
             <a:extLst>
               <a:ext uri="{FF2B5EF4-FFF2-40B4-BE49-F238E27FC236}">
-                <a16:creationId xmlns:a16="http://schemas.microsoft.com/office/drawing/2014/main" id="{3044D709-2C72-6A43-3074-B6BAC4F4A2D8}"/>
+                <a16:creationId xmlns:a16="http://schemas.microsoft.com/office/drawing/2014/main" id="{A2E78EDF-D99E-D251-5865-64C152DA4B13}"/>
               </a:ext>
             </a:extLst>
           </p:cNvPr>
@@ -5432,62 +5408,129 @@
             <p:ph idx="1"/>
           </p:nvPr>
         </p:nvSpPr>
-        <p:spPr/>
+        <p:spPr>
+          <a:xfrm>
+            <a:off x="861111" y="2584719"/>
+            <a:ext cx="3881951" cy="3678303"/>
+          </a:xfrm>
+        </p:spPr>
         <p:txBody>
           <a:bodyPr/>
           <a:lstStyle/>
           <a:p>
             <a:r>
               <a:rPr lang="en-US" dirty="0"/>
-              <a:t>Definition: </a:t>
-            </a:r>
-            <a:r>
-              <a:rPr lang="en-US" dirty="0">
-                <a:solidFill>
-                  <a:schemeClr val="accent2"/>
-                </a:solidFill>
-              </a:rPr>
-              <a:t>Proof Key for Code Exchange (PKCE) </a:t>
-            </a:r>
-            <a:r>
-              <a:rPr lang="en-US" dirty="0"/>
-              <a:t>is an extension to the OAuth 2.0 flow that makes it more secure</a:t>
-            </a:r>
-          </a:p>
-          <a:p>
-            <a:pPr lvl="1"/>
-            <a:r>
-              <a:rPr lang="en-US" dirty="0"/>
-              <a:t>Pronounced as ‘pixie’</a:t>
-            </a:r>
-          </a:p>
-          <a:p>
-            <a:pPr lvl="1"/>
-            <a:r>
-              <a:rPr lang="en-US" dirty="0"/>
-              <a:t>Used on SPAs or mobile apps where we can’t safely store a client secret</a:t>
-            </a:r>
-          </a:p>
-          <a:p>
-            <a:pPr lvl="1"/>
-            <a:r>
-              <a:rPr lang="en-US" dirty="0"/>
-              <a:t>Required in OAuth 2.1</a:t>
-            </a:r>
-          </a:p>
-          <a:p>
-            <a:pPr lvl="1"/>
-            <a:r>
-              <a:rPr lang="en-US" dirty="0"/>
-              <a:t>Not a language or specific code – it’s a standard to be implemented in our code</a:t>
-            </a:r>
-          </a:p>
-        </p:txBody>
-      </p:sp>
+              <a:t>Application Registries define how external system may authenticate with our instance</a:t>
+            </a:r>
+          </a:p>
+          <a:p>
+            <a:r>
+              <a:rPr lang="en-US" dirty="0"/>
+              <a:t>Authorization – directs user to instance for login; respects user ACLs</a:t>
+            </a:r>
+          </a:p>
+          <a:p>
+            <a:r>
+              <a:rPr lang="en-US" dirty="0"/>
+              <a:t>Client credentials – allows us to get an access token with only the client secret and ID; usually used for machine-to-machine communication</a:t>
+            </a:r>
+          </a:p>
+        </p:txBody>
+      </p:sp>
+      <p:pic>
+        <p:nvPicPr>
+          <p:cNvPr id="5" name="Picture 4">
+            <a:extLst>
+              <a:ext uri="{FF2B5EF4-FFF2-40B4-BE49-F238E27FC236}">
+                <a16:creationId xmlns:a16="http://schemas.microsoft.com/office/drawing/2014/main" id="{97CCA791-75EA-373D-0E12-7A4DE628E378}"/>
+              </a:ext>
+            </a:extLst>
+          </p:cNvPr>
+          <p:cNvPicPr>
+            <a:picLocks noChangeAspect="1"/>
+          </p:cNvPicPr>
+          <p:nvPr/>
+        </p:nvPicPr>
+        <p:blipFill>
+          <a:blip r:embed="rId2"/>
+          <a:stretch>
+            <a:fillRect/>
+          </a:stretch>
+        </p:blipFill>
+        <p:spPr>
+          <a:xfrm>
+            <a:off x="4933819" y="1965508"/>
+            <a:ext cx="1867161" cy="619211"/>
+          </a:xfrm>
+          <a:prstGeom prst="rect">
+            <a:avLst/>
+          </a:prstGeom>
+        </p:spPr>
+      </p:pic>
+      <p:pic>
+        <p:nvPicPr>
+          <p:cNvPr id="7" name="Picture 6">
+            <a:extLst>
+              <a:ext uri="{FF2B5EF4-FFF2-40B4-BE49-F238E27FC236}">
+                <a16:creationId xmlns:a16="http://schemas.microsoft.com/office/drawing/2014/main" id="{2C499323-160E-BA1B-49C2-2D637E56ADC0}"/>
+              </a:ext>
+            </a:extLst>
+          </p:cNvPr>
+          <p:cNvPicPr>
+            <a:picLocks noChangeAspect="1"/>
+          </p:cNvPicPr>
+          <p:nvPr/>
+        </p:nvPicPr>
+        <p:blipFill>
+          <a:blip r:embed="rId3"/>
+          <a:stretch>
+            <a:fillRect/>
+          </a:stretch>
+        </p:blipFill>
+        <p:spPr>
+          <a:xfrm>
+            <a:off x="8210442" y="2075060"/>
+            <a:ext cx="1562318" cy="400106"/>
+          </a:xfrm>
+          <a:prstGeom prst="rect">
+            <a:avLst/>
+          </a:prstGeom>
+        </p:spPr>
+      </p:pic>
+      <p:pic>
+        <p:nvPicPr>
+          <p:cNvPr id="9" name="Picture 8">
+            <a:extLst>
+              <a:ext uri="{FF2B5EF4-FFF2-40B4-BE49-F238E27FC236}">
+                <a16:creationId xmlns:a16="http://schemas.microsoft.com/office/drawing/2014/main" id="{3D3A0AD7-2CD8-4236-BAC4-36B5654935E2}"/>
+              </a:ext>
+            </a:extLst>
+          </p:cNvPr>
+          <p:cNvPicPr>
+            <a:picLocks noChangeAspect="1"/>
+          </p:cNvPicPr>
+          <p:nvPr/>
+        </p:nvPicPr>
+        <p:blipFill>
+          <a:blip r:embed="rId4"/>
+          <a:stretch>
+            <a:fillRect/>
+          </a:stretch>
+        </p:blipFill>
+        <p:spPr>
+          <a:xfrm>
+            <a:off x="6096000" y="2993583"/>
+            <a:ext cx="3774731" cy="3451183"/>
+          </a:xfrm>
+          <a:prstGeom prst="rect">
+            <a:avLst/>
+          </a:prstGeom>
+        </p:spPr>
+      </p:pic>
     </p:spTree>
     <p:extLst>
       <p:ext uri="{BB962C8B-B14F-4D97-AF65-F5344CB8AC3E}">
-        <p14:creationId xmlns:p14="http://schemas.microsoft.com/office/powerpoint/2010/main" val="3813627143"/>
+        <p14:creationId xmlns:p14="http://schemas.microsoft.com/office/powerpoint/2010/main" val="2557188315"/>
       </p:ext>
     </p:extLst>
   </p:cSld>
@@ -5519,7 +5562,7 @@
           <p:cNvPr id="2" name="Title 1">
             <a:extLst>
               <a:ext uri="{FF2B5EF4-FFF2-40B4-BE49-F238E27FC236}">
-                <a16:creationId xmlns:a16="http://schemas.microsoft.com/office/drawing/2014/main" id="{DBE813ED-D113-1AC0-341C-D4B330E9DAE1}"/>
+                <a16:creationId xmlns:a16="http://schemas.microsoft.com/office/drawing/2014/main" id="{64B84DD7-AD9C-351C-4447-0A988085BD9C}"/>
               </a:ext>
             </a:extLst>
           </p:cNvPr>
@@ -5537,72 +5580,75 @@
           <a:p>
             <a:r>
               <a:rPr lang="en-US" dirty="0"/>
-              <a:t>When Not Using PKCE</a:t>
-            </a:r>
-          </a:p>
-        </p:txBody>
-      </p:sp>
-      <p:pic>
-        <p:nvPicPr>
-          <p:cNvPr id="5" name="Picture 4">
+              <a:t>Proof Key for Code Exchange</a:t>
+            </a:r>
+          </a:p>
+        </p:txBody>
+      </p:sp>
+      <p:sp>
+        <p:nvSpPr>
+          <p:cNvPr id="3" name="Content Placeholder 2">
             <a:extLst>
               <a:ext uri="{FF2B5EF4-FFF2-40B4-BE49-F238E27FC236}">
-                <a16:creationId xmlns:a16="http://schemas.microsoft.com/office/drawing/2014/main" id="{2BFDF51B-0269-199F-8F46-B9DCA297BADD}"/>
+                <a16:creationId xmlns:a16="http://schemas.microsoft.com/office/drawing/2014/main" id="{3044D709-2C72-6A43-3074-B6BAC4F4A2D8}"/>
               </a:ext>
             </a:extLst>
           </p:cNvPr>
-          <p:cNvPicPr>
-            <a:picLocks noChangeAspect="1"/>
-          </p:cNvPicPr>
-          <p:nvPr/>
-        </p:nvPicPr>
-        <p:blipFill>
-          <a:blip r:embed="rId2"/>
-          <a:stretch>
-            <a:fillRect/>
-          </a:stretch>
-        </p:blipFill>
-        <p:spPr>
-          <a:xfrm>
-            <a:off x="2119290" y="2259430"/>
-            <a:ext cx="7953420" cy="4598570"/>
-          </a:xfrm>
-          <a:prstGeom prst="rect">
-            <a:avLst/>
-          </a:prstGeom>
-        </p:spPr>
-      </p:pic>
-      <p:sp>
-        <p:nvSpPr>
-          <p:cNvPr id="8" name="TextBox 7">
-            <a:extLst>
-              <a:ext uri="{FF2B5EF4-FFF2-40B4-BE49-F238E27FC236}">
-                <a16:creationId xmlns:a16="http://schemas.microsoft.com/office/drawing/2014/main" id="{522EAAD0-917E-DC25-B332-F84DF2883003}"/>
-              </a:ext>
-            </a:extLst>
-          </p:cNvPr>
-          <p:cNvSpPr txBox="1"/>
-          <p:nvPr/>
-        </p:nvSpPr>
-        <p:spPr>
-          <a:xfrm>
-            <a:off x="3716502" y="1803027"/>
-            <a:ext cx="4758995" cy="369332"/>
-          </a:xfrm>
-          <a:prstGeom prst="rect">
-            <a:avLst/>
-          </a:prstGeom>
-          <a:noFill/>
-        </p:spPr>
-        <p:txBody>
-          <a:bodyPr wrap="none" rtlCol="0">
-            <a:spAutoFit/>
-          </a:bodyPr>
-          <a:lstStyle/>
-          <a:p>
-            <a:r>
-              <a:rPr lang="en-US" dirty="0"/>
-              <a:t>User is susceptible to a man-in-the-middle attack</a:t>
+          <p:cNvSpPr>
+            <a:spLocks noGrp="1"/>
+          </p:cNvSpPr>
+          <p:nvPr>
+            <p:ph idx="1"/>
+          </p:nvPr>
+        </p:nvSpPr>
+        <p:spPr/>
+        <p:txBody>
+          <a:bodyPr/>
+          <a:lstStyle/>
+          <a:p>
+            <a:r>
+              <a:rPr lang="en-US" dirty="0"/>
+              <a:t>Definition: </a:t>
+            </a:r>
+            <a:r>
+              <a:rPr lang="en-US" dirty="0">
+                <a:solidFill>
+                  <a:schemeClr val="accent2"/>
+                </a:solidFill>
+              </a:rPr>
+              <a:t>Proof Key for Code Exchange (PKCE) </a:t>
+            </a:r>
+            <a:r>
+              <a:rPr lang="en-US" dirty="0"/>
+              <a:t>is an extension to the OAuth 2.0 flow that makes it more secure</a:t>
+            </a:r>
+          </a:p>
+          <a:p>
+            <a:pPr lvl="1"/>
+            <a:r>
+              <a:rPr lang="en-US" dirty="0"/>
+              <a:t>Pronounced as ‘pixie’</a:t>
+            </a:r>
+          </a:p>
+          <a:p>
+            <a:pPr lvl="1"/>
+            <a:r>
+              <a:rPr lang="en-US" dirty="0"/>
+              <a:t>Used on SPAs or mobile apps where we can’t safely store a client secret</a:t>
+            </a:r>
+          </a:p>
+          <a:p>
+            <a:pPr lvl="1"/>
+            <a:r>
+              <a:rPr lang="en-US" dirty="0"/>
+              <a:t>Required in OAuth 2.1</a:t>
+            </a:r>
+          </a:p>
+          <a:p>
+            <a:pPr lvl="1"/>
+            <a:r>
+              <a:rPr lang="en-US" dirty="0"/>
+              <a:t>Not a language or specific code – it’s a standard to be implemented in our code</a:t>
             </a:r>
           </a:p>
         </p:txBody>
@@ -5610,7 +5656,7 @@
     </p:spTree>
     <p:extLst>
       <p:ext uri="{BB962C8B-B14F-4D97-AF65-F5344CB8AC3E}">
-        <p14:creationId xmlns:p14="http://schemas.microsoft.com/office/powerpoint/2010/main" val="2397391414"/>
+        <p14:creationId xmlns:p14="http://schemas.microsoft.com/office/powerpoint/2010/main" val="3813627143"/>
       </p:ext>
     </p:extLst>
   </p:cSld>
@@ -5642,7 +5688,7 @@
           <p:cNvPr id="2" name="Title 1">
             <a:extLst>
               <a:ext uri="{FF2B5EF4-FFF2-40B4-BE49-F238E27FC236}">
-                <a16:creationId xmlns:a16="http://schemas.microsoft.com/office/drawing/2014/main" id="{605C068A-F609-2C75-FDFC-784289DED473}"/>
+                <a16:creationId xmlns:a16="http://schemas.microsoft.com/office/drawing/2014/main" id="{DBE813ED-D113-1AC0-341C-D4B330E9DAE1}"/>
               </a:ext>
             </a:extLst>
           </p:cNvPr>
@@ -5660,7 +5706,7 @@
           <a:p>
             <a:r>
               <a:rPr lang="en-US" dirty="0"/>
-              <a:t>Using PKCE</a:t>
+              <a:t>When Not Using PKCE</a:t>
             </a:r>
           </a:p>
         </p:txBody>
@@ -5670,7 +5716,7 @@
           <p:cNvPr id="5" name="Picture 4">
             <a:extLst>
               <a:ext uri="{FF2B5EF4-FFF2-40B4-BE49-F238E27FC236}">
-                <a16:creationId xmlns:a16="http://schemas.microsoft.com/office/drawing/2014/main" id="{38B542B2-F639-47A4-D72E-90F23F9582E8}"/>
+                <a16:creationId xmlns:a16="http://schemas.microsoft.com/office/drawing/2014/main" id="{2BFDF51B-0269-199F-8F46-B9DCA297BADD}"/>
               </a:ext>
             </a:extLst>
           </p:cNvPr>
@@ -5687,8 +5733,8 @@
         </p:blipFill>
         <p:spPr>
           <a:xfrm>
-            <a:off x="1952457" y="1945338"/>
-            <a:ext cx="8287085" cy="4105401"/>
+            <a:off x="2119290" y="2259430"/>
+            <a:ext cx="7953420" cy="4598570"/>
           </a:xfrm>
           <a:prstGeom prst="rect">
             <a:avLst/>
@@ -5697,10 +5743,10 @@
       </p:pic>
       <p:sp>
         <p:nvSpPr>
-          <p:cNvPr id="6" name="TextBox 5">
+          <p:cNvPr id="8" name="TextBox 7">
             <a:extLst>
               <a:ext uri="{FF2B5EF4-FFF2-40B4-BE49-F238E27FC236}">
-                <a16:creationId xmlns:a16="http://schemas.microsoft.com/office/drawing/2014/main" id="{9BC0E693-DEB9-6C10-D463-D2ED571F3FB5}"/>
+                <a16:creationId xmlns:a16="http://schemas.microsoft.com/office/drawing/2014/main" id="{522EAAD0-917E-DC25-B332-F84DF2883003}"/>
               </a:ext>
             </a:extLst>
           </p:cNvPr>
@@ -5709,8 +5755,8 @@
         </p:nvSpPr>
         <p:spPr>
           <a:xfrm>
-            <a:off x="1239509" y="6050739"/>
-            <a:ext cx="9712980" cy="646331"/>
+            <a:off x="3716502" y="1803027"/>
+            <a:ext cx="4758995" cy="369332"/>
           </a:xfrm>
           <a:prstGeom prst="rect">
             <a:avLst/>
@@ -5725,21 +5771,7 @@
           <a:p>
             <a:r>
               <a:rPr lang="en-US" dirty="0"/>
-              <a:t>Even if attackers get the authorization code, they won’t have the </a:t>
-            </a:r>
-            <a:r>
-              <a:rPr lang="en-US" dirty="0" err="1"/>
-              <a:t>code_verifier</a:t>
-            </a:r>
-            <a:r>
-              <a:rPr lang="en-US" dirty="0"/>
-              <a:t> = no access!</a:t>
-            </a:r>
-          </a:p>
-          <a:p>
-            <a:r>
-              <a:rPr lang="en-US" dirty="0"/>
-              <a:t>The access token will be shorter lived, but it is still not 100% safe to store in the client (XSS attacks)…</a:t>
+              <a:t>User is susceptible to a man-in-the-middle attack</a:t>
             </a:r>
           </a:p>
         </p:txBody>
@@ -5747,7 +5779,7 @@
     </p:spTree>
     <p:extLst>
       <p:ext uri="{BB962C8B-B14F-4D97-AF65-F5344CB8AC3E}">
-        <p14:creationId xmlns:p14="http://schemas.microsoft.com/office/powerpoint/2010/main" val="1935696903"/>
+        <p14:creationId xmlns:p14="http://schemas.microsoft.com/office/powerpoint/2010/main" val="2397391414"/>
       </p:ext>
     </p:extLst>
   </p:cSld>
@@ -5779,7 +5811,7 @@
           <p:cNvPr id="2" name="Title 1">
             <a:extLst>
               <a:ext uri="{FF2B5EF4-FFF2-40B4-BE49-F238E27FC236}">
-                <a16:creationId xmlns:a16="http://schemas.microsoft.com/office/drawing/2014/main" id="{E244B89B-91AE-EAF5-748D-02615820C620}"/>
+                <a16:creationId xmlns:a16="http://schemas.microsoft.com/office/drawing/2014/main" id="{605C068A-F609-2C75-FDFC-784289DED473}"/>
               </a:ext>
             </a:extLst>
           </p:cNvPr>
@@ -5797,75 +5829,7 @@
           <a:p>
             <a:r>
               <a:rPr lang="en-US" dirty="0"/>
-              <a:t>Want a BFF?</a:t>
-            </a:r>
-          </a:p>
-        </p:txBody>
-      </p:sp>
-      <p:sp>
-        <p:nvSpPr>
-          <p:cNvPr id="3" name="Content Placeholder 2">
-            <a:extLst>
-              <a:ext uri="{FF2B5EF4-FFF2-40B4-BE49-F238E27FC236}">
-                <a16:creationId xmlns:a16="http://schemas.microsoft.com/office/drawing/2014/main" id="{008EE97C-8EB9-8682-3BB5-8DD233C574C0}"/>
-              </a:ext>
-            </a:extLst>
-          </p:cNvPr>
-          <p:cNvSpPr>
-            <a:spLocks noGrp="1"/>
-          </p:cNvSpPr>
-          <p:nvPr>
-            <p:ph idx="1"/>
-          </p:nvPr>
-        </p:nvSpPr>
-        <p:spPr>
-          <a:xfrm>
-            <a:off x="581193" y="2180496"/>
-            <a:ext cx="3319004" cy="4223160"/>
-          </a:xfrm>
-        </p:spPr>
-        <p:txBody>
-          <a:bodyPr>
-            <a:normAutofit lnSpcReduction="10000"/>
-          </a:bodyPr>
-          <a:lstStyle/>
-          <a:p>
-            <a:r>
-              <a:rPr lang="en-US" dirty="0"/>
-              <a:t>Definition: A </a:t>
-            </a:r>
-            <a:r>
-              <a:rPr lang="en-US" dirty="0">
-                <a:solidFill>
-                  <a:schemeClr val="accent2"/>
-                </a:solidFill>
-              </a:rPr>
-              <a:t>Backend for Frontend </a:t>
-            </a:r>
-            <a:r>
-              <a:rPr lang="en-US" dirty="0"/>
-              <a:t>design pattern provides a tailored backend interface for different types of clients</a:t>
-            </a:r>
-          </a:p>
-          <a:p>
-            <a:pPr lvl="1"/>
-            <a:r>
-              <a:rPr lang="en-US" dirty="0"/>
-              <a:t>Could have one for web and another for mobile apps</a:t>
-            </a:r>
-          </a:p>
-          <a:p>
-            <a:pPr lvl="1"/>
-            <a:r>
-              <a:rPr lang="en-US" dirty="0"/>
-              <a:t>Acts as a proxy layer in between the client and backend</a:t>
-            </a:r>
-          </a:p>
-          <a:p>
-            <a:pPr lvl="1"/>
-            <a:r>
-              <a:rPr lang="en-US" dirty="0"/>
-              <a:t>Auth tokens are stored on the BFF so no chance of XSS attacks, the client only ever see what we return in the BFF (likely record data)</a:t>
+              <a:t>Using PKCE</a:t>
             </a:r>
           </a:p>
         </p:txBody>
@@ -5875,7 +5839,7 @@
           <p:cNvPr id="5" name="Picture 4">
             <a:extLst>
               <a:ext uri="{FF2B5EF4-FFF2-40B4-BE49-F238E27FC236}">
-                <a16:creationId xmlns:a16="http://schemas.microsoft.com/office/drawing/2014/main" id="{51F11239-5A34-9A0C-B1B7-5373CFE52781}"/>
+                <a16:creationId xmlns:a16="http://schemas.microsoft.com/office/drawing/2014/main" id="{38B542B2-F639-47A4-D72E-90F23F9582E8}"/>
               </a:ext>
             </a:extLst>
           </p:cNvPr>
@@ -5892,18 +5856,67 @@
         </p:blipFill>
         <p:spPr>
           <a:xfrm>
-            <a:off x="4201181" y="2089983"/>
-            <a:ext cx="7409626" cy="4223160"/>
+            <a:off x="1952457" y="1945338"/>
+            <a:ext cx="8287085" cy="4105401"/>
           </a:xfrm>
           <a:prstGeom prst="rect">
             <a:avLst/>
           </a:prstGeom>
         </p:spPr>
       </p:pic>
+      <p:sp>
+        <p:nvSpPr>
+          <p:cNvPr id="6" name="TextBox 5">
+            <a:extLst>
+              <a:ext uri="{FF2B5EF4-FFF2-40B4-BE49-F238E27FC236}">
+                <a16:creationId xmlns:a16="http://schemas.microsoft.com/office/drawing/2014/main" id="{9BC0E693-DEB9-6C10-D463-D2ED571F3FB5}"/>
+              </a:ext>
+            </a:extLst>
+          </p:cNvPr>
+          <p:cNvSpPr txBox="1"/>
+          <p:nvPr/>
+        </p:nvSpPr>
+        <p:spPr>
+          <a:xfrm>
+            <a:off x="1239509" y="6050739"/>
+            <a:ext cx="9712980" cy="646331"/>
+          </a:xfrm>
+          <a:prstGeom prst="rect">
+            <a:avLst/>
+          </a:prstGeom>
+          <a:noFill/>
+        </p:spPr>
+        <p:txBody>
+          <a:bodyPr wrap="none" rtlCol="0">
+            <a:spAutoFit/>
+          </a:bodyPr>
+          <a:lstStyle/>
+          <a:p>
+            <a:r>
+              <a:rPr lang="en-US" dirty="0"/>
+              <a:t>Even if attackers get the authorization code, they won’t have the </a:t>
+            </a:r>
+            <a:r>
+              <a:rPr lang="en-US" dirty="0" err="1"/>
+              <a:t>code_verifier</a:t>
+            </a:r>
+            <a:r>
+              <a:rPr lang="en-US" dirty="0"/>
+              <a:t> = no access!</a:t>
+            </a:r>
+          </a:p>
+          <a:p>
+            <a:r>
+              <a:rPr lang="en-US" dirty="0"/>
+              <a:t>The access token will be shorter lived, but it is still not 100% safe to store in the client (XSS attacks)…</a:t>
+            </a:r>
+          </a:p>
+        </p:txBody>
+      </p:sp>
     </p:spTree>
     <p:extLst>
       <p:ext uri="{BB962C8B-B14F-4D97-AF65-F5344CB8AC3E}">
-        <p14:creationId xmlns:p14="http://schemas.microsoft.com/office/powerpoint/2010/main" val="320650873"/>
+        <p14:creationId xmlns:p14="http://schemas.microsoft.com/office/powerpoint/2010/main" val="1935696903"/>
       </p:ext>
     </p:extLst>
   </p:cSld>
@@ -5935,7 +5948,7 @@
           <p:cNvPr id="2" name="Title 1">
             <a:extLst>
               <a:ext uri="{FF2B5EF4-FFF2-40B4-BE49-F238E27FC236}">
-                <a16:creationId xmlns:a16="http://schemas.microsoft.com/office/drawing/2014/main" id="{3236FBCD-DCF9-293F-2ED3-47F86D107F5B}"/>
+                <a16:creationId xmlns:a16="http://schemas.microsoft.com/office/drawing/2014/main" id="{E244B89B-91AE-EAF5-748D-02615820C620}"/>
               </a:ext>
             </a:extLst>
           </p:cNvPr>
@@ -5953,7 +5966,7 @@
           <a:p>
             <a:r>
               <a:rPr lang="en-US" dirty="0"/>
-              <a:t>What is Express?</a:t>
+              <a:t>Want a BFF?</a:t>
             </a:r>
           </a:p>
         </p:txBody>
@@ -5963,7 +5976,7 @@
           <p:cNvPr id="3" name="Content Placeholder 2">
             <a:extLst>
               <a:ext uri="{FF2B5EF4-FFF2-40B4-BE49-F238E27FC236}">
-                <a16:creationId xmlns:a16="http://schemas.microsoft.com/office/drawing/2014/main" id="{548F3EF7-9A49-C3D6-AE3F-77D4428297B9}"/>
+                <a16:creationId xmlns:a16="http://schemas.microsoft.com/office/drawing/2014/main" id="{008EE97C-8EB9-8682-3BB5-8DD233C574C0}"/>
               </a:ext>
             </a:extLst>
           </p:cNvPr>
@@ -5974,14 +5987,21 @@
             <p:ph idx="1"/>
           </p:nvPr>
         </p:nvSpPr>
-        <p:spPr/>
-        <p:txBody>
-          <a:bodyPr/>
-          <a:lstStyle/>
-          <a:p>
-            <a:r>
-              <a:rPr lang="en-US" dirty="0"/>
-              <a:t>Definition: </a:t>
+        <p:spPr>
+          <a:xfrm>
+            <a:off x="581193" y="2180496"/>
+            <a:ext cx="3319004" cy="4223160"/>
+          </a:xfrm>
+        </p:spPr>
+        <p:txBody>
+          <a:bodyPr>
+            <a:normAutofit lnSpcReduction="10000"/>
+          </a:bodyPr>
+          <a:lstStyle/>
+          <a:p>
+            <a:r>
+              <a:rPr lang="en-US" dirty="0"/>
+              <a:t>Definition: A </a:t>
             </a:r>
             <a:r>
               <a:rPr lang="en-US" dirty="0">
@@ -5989,52 +6009,70 @@
                   <a:schemeClr val="accent2"/>
                 </a:solidFill>
               </a:rPr>
-              <a:t>Express.js </a:t>
-            </a:r>
-            <a:r>
-              <a:rPr lang="en-US" dirty="0"/>
-              <a:t>aka </a:t>
-            </a:r>
-            <a:r>
-              <a:rPr lang="en-US" dirty="0">
-                <a:solidFill>
-                  <a:schemeClr val="accent2"/>
-                </a:solidFill>
-              </a:rPr>
-              <a:t>Express</a:t>
-            </a:r>
-            <a:r>
-              <a:rPr lang="en-US" dirty="0"/>
-              <a:t>, is a free open-source back-end web application framework for node.js </a:t>
+              <a:t>Backend for Frontend </a:t>
+            </a:r>
+            <a:r>
+              <a:rPr lang="en-US" dirty="0"/>
+              <a:t>design pattern provides a tailored backend interface for different types of clients</a:t>
             </a:r>
           </a:p>
           <a:p>
             <a:pPr lvl="1"/>
             <a:r>
               <a:rPr lang="en-US" dirty="0"/>
-              <a:t>Support for middleware</a:t>
+              <a:t>Could have one for web and another for mobile apps</a:t>
             </a:r>
           </a:p>
           <a:p>
             <a:pPr lvl="1"/>
             <a:r>
               <a:rPr lang="en-US" dirty="0"/>
-              <a:t>Routing</a:t>
+              <a:t>Acts as a proxy layer in between the client and backend</a:t>
             </a:r>
           </a:p>
           <a:p>
             <a:pPr lvl="1"/>
             <a:r>
               <a:rPr lang="en-US" dirty="0"/>
-              <a:t>Unopinionated – bring your own design pattern </a:t>
-            </a:r>
-          </a:p>
-        </p:txBody>
-      </p:sp>
+              <a:t>Auth tokens are stored on the BFF so no chance of XSS attacks, the client only ever see what we return in the BFF (likely record data)</a:t>
+            </a:r>
+          </a:p>
+        </p:txBody>
+      </p:sp>
+      <p:pic>
+        <p:nvPicPr>
+          <p:cNvPr id="5" name="Picture 4">
+            <a:extLst>
+              <a:ext uri="{FF2B5EF4-FFF2-40B4-BE49-F238E27FC236}">
+                <a16:creationId xmlns:a16="http://schemas.microsoft.com/office/drawing/2014/main" id="{51F11239-5A34-9A0C-B1B7-5373CFE52781}"/>
+              </a:ext>
+            </a:extLst>
+          </p:cNvPr>
+          <p:cNvPicPr>
+            <a:picLocks noChangeAspect="1"/>
+          </p:cNvPicPr>
+          <p:nvPr/>
+        </p:nvPicPr>
+        <p:blipFill>
+          <a:blip r:embed="rId2"/>
+          <a:stretch>
+            <a:fillRect/>
+          </a:stretch>
+        </p:blipFill>
+        <p:spPr>
+          <a:xfrm>
+            <a:off x="4201181" y="2089983"/>
+            <a:ext cx="7409626" cy="4223160"/>
+          </a:xfrm>
+          <a:prstGeom prst="rect">
+            <a:avLst/>
+          </a:prstGeom>
+        </p:spPr>
+      </p:pic>
     </p:spTree>
     <p:extLst>
       <p:ext uri="{BB962C8B-B14F-4D97-AF65-F5344CB8AC3E}">
-        <p14:creationId xmlns:p14="http://schemas.microsoft.com/office/powerpoint/2010/main" val="225980852"/>
+        <p14:creationId xmlns:p14="http://schemas.microsoft.com/office/powerpoint/2010/main" val="320650873"/>
       </p:ext>
     </p:extLst>
   </p:cSld>
@@ -6066,7 +6104,7 @@
           <p:cNvPr id="2" name="Title 1">
             <a:extLst>
               <a:ext uri="{FF2B5EF4-FFF2-40B4-BE49-F238E27FC236}">
-                <a16:creationId xmlns:a16="http://schemas.microsoft.com/office/drawing/2014/main" id="{D8C64718-9672-4019-CE66-8E940875C1C4}"/>
+                <a16:creationId xmlns:a16="http://schemas.microsoft.com/office/drawing/2014/main" id="{3236FBCD-DCF9-293F-2ED3-47F86D107F5B}"/>
               </a:ext>
             </a:extLst>
           </p:cNvPr>
@@ -6084,7 +6122,7 @@
           <a:p>
             <a:r>
               <a:rPr lang="en-US" dirty="0"/>
-              <a:t>Express Basics</a:t>
+              <a:t>What is Express?</a:t>
             </a:r>
           </a:p>
         </p:txBody>
@@ -6094,7 +6132,7 @@
           <p:cNvPr id="3" name="Content Placeholder 2">
             <a:extLst>
               <a:ext uri="{FF2B5EF4-FFF2-40B4-BE49-F238E27FC236}">
-                <a16:creationId xmlns:a16="http://schemas.microsoft.com/office/drawing/2014/main" id="{7684D29A-C009-A6D0-B99F-DFC06B7A43A0}"/>
+                <a16:creationId xmlns:a16="http://schemas.microsoft.com/office/drawing/2014/main" id="{548F3EF7-9A49-C3D6-AE3F-77D4428297B9}"/>
               </a:ext>
             </a:extLst>
           </p:cNvPr>
@@ -6105,165 +6143,67 @@
             <p:ph idx="1"/>
           </p:nvPr>
         </p:nvSpPr>
-        <p:spPr>
-          <a:xfrm>
-            <a:off x="581193" y="2180496"/>
-            <a:ext cx="4410686" cy="3678303"/>
-          </a:xfrm>
-        </p:spPr>
+        <p:spPr/>
         <p:txBody>
           <a:bodyPr/>
           <a:lstStyle/>
           <a:p>
             <a:r>
               <a:rPr lang="en-US" dirty="0"/>
-              <a:t>We create the express app by first installing with ‘</a:t>
-            </a:r>
-            <a:r>
-              <a:rPr lang="en-US" dirty="0" err="1"/>
-              <a:t>npm</a:t>
-            </a:r>
-            <a:r>
-              <a:rPr lang="en-US" dirty="0"/>
-              <a:t> install </a:t>
-            </a:r>
-            <a:r>
-              <a:rPr lang="en-US" dirty="0" err="1"/>
-              <a:t>express’</a:t>
-            </a:r>
-            <a:r>
-              <a:rPr lang="en-US" dirty="0"/>
-              <a:t> </a:t>
-            </a:r>
-          </a:p>
-          <a:p>
-            <a:r>
-              <a:rPr lang="en-US" dirty="0"/>
-              <a:t>Import into a </a:t>
-            </a:r>
-            <a:r>
-              <a:rPr lang="en-US" dirty="0" err="1"/>
-              <a:t>js</a:t>
-            </a:r>
-            <a:r>
-              <a:rPr lang="en-US" dirty="0"/>
-              <a:t> file to instantiate the app</a:t>
-            </a:r>
-          </a:p>
-          <a:p>
-            <a:r>
-              <a:rPr lang="en-US" dirty="0"/>
-              <a:t>Add routes &amp; define route logic before setting the response</a:t>
-            </a:r>
-          </a:p>
-          <a:p>
-            <a:r>
-              <a:rPr lang="en-US" dirty="0"/>
-              <a:t>Start listening to requests with .listen()</a:t>
-            </a:r>
-          </a:p>
-          <a:p>
-            <a:r>
-              <a:rPr lang="en-US" dirty="0"/>
-              <a:t>Start Express server with ‘node server.js’</a:t>
-            </a:r>
-          </a:p>
-        </p:txBody>
-      </p:sp>
-      <p:pic>
-        <p:nvPicPr>
-          <p:cNvPr id="5" name="Picture 4">
-            <a:extLst>
-              <a:ext uri="{FF2B5EF4-FFF2-40B4-BE49-F238E27FC236}">
-                <a16:creationId xmlns:a16="http://schemas.microsoft.com/office/drawing/2014/main" id="{C00A3A71-17AF-741B-3067-E9BCB720D65F}"/>
-              </a:ext>
-            </a:extLst>
-          </p:cNvPr>
-          <p:cNvPicPr>
-            <a:picLocks noChangeAspect="1"/>
-          </p:cNvPicPr>
-          <p:nvPr/>
-        </p:nvPicPr>
-        <p:blipFill>
-          <a:blip r:embed="rId2"/>
-          <a:stretch>
-            <a:fillRect/>
-          </a:stretch>
-        </p:blipFill>
-        <p:spPr>
-          <a:xfrm>
-            <a:off x="7200123" y="2515449"/>
-            <a:ext cx="2391109" cy="371527"/>
-          </a:xfrm>
-          <a:prstGeom prst="rect">
-            <a:avLst/>
-          </a:prstGeom>
-        </p:spPr>
-      </p:pic>
-      <p:pic>
-        <p:nvPicPr>
-          <p:cNvPr id="7" name="Picture 6">
-            <a:extLst>
-              <a:ext uri="{FF2B5EF4-FFF2-40B4-BE49-F238E27FC236}">
-                <a16:creationId xmlns:a16="http://schemas.microsoft.com/office/drawing/2014/main" id="{F8C65D10-84F3-B338-A999-B36EBBA5AF39}"/>
-              </a:ext>
-            </a:extLst>
-          </p:cNvPr>
-          <p:cNvPicPr>
-            <a:picLocks noChangeAspect="1"/>
-          </p:cNvPicPr>
-          <p:nvPr/>
-        </p:nvPicPr>
-        <p:blipFill>
-          <a:blip r:embed="rId3"/>
-          <a:stretch>
-            <a:fillRect/>
-          </a:stretch>
-        </p:blipFill>
-        <p:spPr>
-          <a:xfrm>
-            <a:off x="6326075" y="2139844"/>
-            <a:ext cx="3943900" cy="342948"/>
-          </a:xfrm>
-          <a:prstGeom prst="rect">
-            <a:avLst/>
-          </a:prstGeom>
-        </p:spPr>
-      </p:pic>
-      <p:pic>
-        <p:nvPicPr>
-          <p:cNvPr id="9" name="Picture 8">
-            <a:extLst>
-              <a:ext uri="{FF2B5EF4-FFF2-40B4-BE49-F238E27FC236}">
-                <a16:creationId xmlns:a16="http://schemas.microsoft.com/office/drawing/2014/main" id="{403C23AC-E61F-813C-54BB-E79F9A6DC935}"/>
-              </a:ext>
-            </a:extLst>
-          </p:cNvPr>
-          <p:cNvPicPr>
-            <a:picLocks noChangeAspect="1"/>
-          </p:cNvPicPr>
-          <p:nvPr/>
-        </p:nvPicPr>
-        <p:blipFill>
-          <a:blip r:embed="rId4"/>
-          <a:stretch>
-            <a:fillRect/>
-          </a:stretch>
-        </p:blipFill>
-        <p:spPr>
-          <a:xfrm>
-            <a:off x="6096000" y="3110910"/>
-            <a:ext cx="4519005" cy="3280843"/>
-          </a:xfrm>
-          <a:prstGeom prst="rect">
-            <a:avLst/>
-          </a:prstGeom>
-        </p:spPr>
-      </p:pic>
+              <a:t>Definition: </a:t>
+            </a:r>
+            <a:r>
+              <a:rPr lang="en-US" dirty="0">
+                <a:solidFill>
+                  <a:schemeClr val="accent2"/>
+                </a:solidFill>
+              </a:rPr>
+              <a:t>Express.js </a:t>
+            </a:r>
+            <a:r>
+              <a:rPr lang="en-US" dirty="0"/>
+              <a:t>aka </a:t>
+            </a:r>
+            <a:r>
+              <a:rPr lang="en-US" dirty="0">
+                <a:solidFill>
+                  <a:schemeClr val="accent2"/>
+                </a:solidFill>
+              </a:rPr>
+              <a:t>Express</a:t>
+            </a:r>
+            <a:r>
+              <a:rPr lang="en-US" dirty="0"/>
+              <a:t>, is a free open-source back-end web application framework for node.js </a:t>
+            </a:r>
+          </a:p>
+          <a:p>
+            <a:pPr lvl="1"/>
+            <a:r>
+              <a:rPr lang="en-US" dirty="0"/>
+              <a:t>Support for middleware</a:t>
+            </a:r>
+          </a:p>
+          <a:p>
+            <a:pPr lvl="1"/>
+            <a:r>
+              <a:rPr lang="en-US" dirty="0"/>
+              <a:t>Routing</a:t>
+            </a:r>
+          </a:p>
+          <a:p>
+            <a:pPr lvl="1"/>
+            <a:r>
+              <a:rPr lang="en-US" dirty="0"/>
+              <a:t>Unopinionated – bring your own design pattern </a:t>
+            </a:r>
+          </a:p>
+        </p:txBody>
+      </p:sp>
     </p:spTree>
     <p:extLst>
       <p:ext uri="{BB962C8B-B14F-4D97-AF65-F5344CB8AC3E}">
-        <p14:creationId xmlns:p14="http://schemas.microsoft.com/office/powerpoint/2010/main" val="3462095177"/>
+        <p14:creationId xmlns:p14="http://schemas.microsoft.com/office/powerpoint/2010/main" val="225980852"/>
       </p:ext>
     </p:extLst>
   </p:cSld>
@@ -6295,7 +6235,7 @@
           <p:cNvPr id="2" name="Title 1">
             <a:extLst>
               <a:ext uri="{FF2B5EF4-FFF2-40B4-BE49-F238E27FC236}">
-                <a16:creationId xmlns:a16="http://schemas.microsoft.com/office/drawing/2014/main" id="{7155A263-5610-8325-1962-01E9C5E4BC22}"/>
+                <a16:creationId xmlns:a16="http://schemas.microsoft.com/office/drawing/2014/main" id="{D8C64718-9672-4019-CE66-8E940875C1C4}"/>
               </a:ext>
             </a:extLst>
           </p:cNvPr>
@@ -6313,15 +6253,7 @@
           <a:p>
             <a:r>
               <a:rPr lang="en-US" dirty="0"/>
-              <a:t>Application Registry - </a:t>
-            </a:r>
-            <a:r>
-              <a:rPr lang="en-US" dirty="0" err="1"/>
-              <a:t>Oauth</a:t>
-            </a:r>
-            <a:r>
-              <a:rPr lang="en-US" dirty="0"/>
-              <a:t> Client Setup</a:t>
+              <a:t>Express Basics</a:t>
             </a:r>
           </a:p>
         </p:txBody>
@@ -6331,7 +6263,7 @@
           <p:cNvPr id="3" name="Content Placeholder 2">
             <a:extLst>
               <a:ext uri="{FF2B5EF4-FFF2-40B4-BE49-F238E27FC236}">
-                <a16:creationId xmlns:a16="http://schemas.microsoft.com/office/drawing/2014/main" id="{BBDFD3CB-B2C4-1F4F-6910-84500C0E8555}"/>
+                <a16:creationId xmlns:a16="http://schemas.microsoft.com/office/drawing/2014/main" id="{7684D29A-C009-A6D0-B99F-DFC06B7A43A0}"/>
               </a:ext>
             </a:extLst>
           </p:cNvPr>
@@ -6344,8 +6276,8 @@
         </p:nvSpPr>
         <p:spPr>
           <a:xfrm>
-            <a:off x="581193" y="2180495"/>
-            <a:ext cx="3620694" cy="3975349"/>
+            <a:off x="581193" y="2180496"/>
+            <a:ext cx="4410686" cy="3678303"/>
           </a:xfrm>
         </p:spPr>
         <p:txBody>
@@ -6353,24 +6285,56 @@
           <a:lstStyle/>
           <a:p>
             <a:r>
+              <a:rPr lang="en-US" dirty="0"/>
+              <a:t>We create the express app by first installing with ‘</a:t>
+            </a:r>
+            <a:r>
               <a:rPr lang="en-US" dirty="0" err="1"/>
-              <a:t>RedirectURL</a:t>
-            </a:r>
-            <a:r>
-              <a:rPr lang="en-US" dirty="0"/>
-              <a:t> – the URL that ServiceNow will direct the client to while sending the authorization token (Part 2 of the PKCE Auth Flow)</a:t>
-            </a:r>
-          </a:p>
-          <a:p>
-            <a:r>
-              <a:rPr lang="en-US" dirty="0"/>
-              <a:t>Client ID/Secret – used in authentication steps </a:t>
-            </a:r>
-          </a:p>
-          <a:p>
-            <a:r>
-              <a:rPr lang="en-US" dirty="0"/>
-              <a:t>This is a public client – required to use the PKCE flow </a:t>
+              <a:t>npm</a:t>
+            </a:r>
+            <a:r>
+              <a:rPr lang="en-US" dirty="0"/>
+              <a:t> install </a:t>
+            </a:r>
+            <a:r>
+              <a:rPr lang="en-US" dirty="0" err="1"/>
+              <a:t>express’</a:t>
+            </a:r>
+            <a:r>
+              <a:rPr lang="en-US" dirty="0"/>
+              <a:t> </a:t>
+            </a:r>
+          </a:p>
+          <a:p>
+            <a:r>
+              <a:rPr lang="en-US" dirty="0"/>
+              <a:t>Import into a </a:t>
+            </a:r>
+            <a:r>
+              <a:rPr lang="en-US" dirty="0" err="1"/>
+              <a:t>js</a:t>
+            </a:r>
+            <a:r>
+              <a:rPr lang="en-US" dirty="0"/>
+              <a:t> file to instantiate the app</a:t>
+            </a:r>
+          </a:p>
+          <a:p>
+            <a:r>
+              <a:rPr lang="en-US" dirty="0"/>
+              <a:t>Add routes &amp; define route logic before setting the response</a:t>
+            </a:r>
+          </a:p>
+          <a:p>
+            <a:r>
+              <a:rPr lang="en-US" dirty="0"/>
+              <a:t>Start listening to requests with .listen()</a:t>
+            </a:r>
+          </a:p>
+          <a:p>
+            <a:r>
+              <a:rPr lang="en-US" dirty="0"/>
+              <a:t>Start Express server with ‘node server.js’</a:t>
             </a:r>
           </a:p>
         </p:txBody>
@@ -6380,7 +6344,7 @@
           <p:cNvPr id="5" name="Picture 4">
             <a:extLst>
               <a:ext uri="{FF2B5EF4-FFF2-40B4-BE49-F238E27FC236}">
-                <a16:creationId xmlns:a16="http://schemas.microsoft.com/office/drawing/2014/main" id="{D3BB9DA1-79C1-75EB-2BB2-893087415940}"/>
+                <a16:creationId xmlns:a16="http://schemas.microsoft.com/office/drawing/2014/main" id="{C00A3A71-17AF-741B-3067-E9BCB720D65F}"/>
               </a:ext>
             </a:extLst>
           </p:cNvPr>
@@ -6397,8 +6361,68 @@
         </p:blipFill>
         <p:spPr>
           <a:xfrm>
-            <a:off x="4419598" y="2278467"/>
-            <a:ext cx="7506893" cy="3711462"/>
+            <a:off x="7200123" y="2515449"/>
+            <a:ext cx="2391109" cy="371527"/>
+          </a:xfrm>
+          <a:prstGeom prst="rect">
+            <a:avLst/>
+          </a:prstGeom>
+        </p:spPr>
+      </p:pic>
+      <p:pic>
+        <p:nvPicPr>
+          <p:cNvPr id="7" name="Picture 6">
+            <a:extLst>
+              <a:ext uri="{FF2B5EF4-FFF2-40B4-BE49-F238E27FC236}">
+                <a16:creationId xmlns:a16="http://schemas.microsoft.com/office/drawing/2014/main" id="{F8C65D10-84F3-B338-A999-B36EBBA5AF39}"/>
+              </a:ext>
+            </a:extLst>
+          </p:cNvPr>
+          <p:cNvPicPr>
+            <a:picLocks noChangeAspect="1"/>
+          </p:cNvPicPr>
+          <p:nvPr/>
+        </p:nvPicPr>
+        <p:blipFill>
+          <a:blip r:embed="rId3"/>
+          <a:stretch>
+            <a:fillRect/>
+          </a:stretch>
+        </p:blipFill>
+        <p:spPr>
+          <a:xfrm>
+            <a:off x="6326075" y="2139844"/>
+            <a:ext cx="3943900" cy="342948"/>
+          </a:xfrm>
+          <a:prstGeom prst="rect">
+            <a:avLst/>
+          </a:prstGeom>
+        </p:spPr>
+      </p:pic>
+      <p:pic>
+        <p:nvPicPr>
+          <p:cNvPr id="9" name="Picture 8">
+            <a:extLst>
+              <a:ext uri="{FF2B5EF4-FFF2-40B4-BE49-F238E27FC236}">
+                <a16:creationId xmlns:a16="http://schemas.microsoft.com/office/drawing/2014/main" id="{403C23AC-E61F-813C-54BB-E79F9A6DC935}"/>
+              </a:ext>
+            </a:extLst>
+          </p:cNvPr>
+          <p:cNvPicPr>
+            <a:picLocks noChangeAspect="1"/>
+          </p:cNvPicPr>
+          <p:nvPr/>
+        </p:nvPicPr>
+        <p:blipFill>
+          <a:blip r:embed="rId4"/>
+          <a:stretch>
+            <a:fillRect/>
+          </a:stretch>
+        </p:blipFill>
+        <p:spPr>
+          <a:xfrm>
+            <a:off x="6096000" y="3110910"/>
+            <a:ext cx="4519005" cy="3280843"/>
           </a:xfrm>
           <a:prstGeom prst="rect">
             <a:avLst/>
@@ -6408,7 +6432,7 @@
     </p:spTree>
     <p:extLst>
       <p:ext uri="{BB962C8B-B14F-4D97-AF65-F5344CB8AC3E}">
-        <p14:creationId xmlns:p14="http://schemas.microsoft.com/office/powerpoint/2010/main" val="2947899421"/>
+        <p14:creationId xmlns:p14="http://schemas.microsoft.com/office/powerpoint/2010/main" val="3462095177"/>
       </p:ext>
     </p:extLst>
   </p:cSld>
@@ -6535,6 +6559,151 @@
 </file>
 
 <file path=ppt/slides/slide20.xml><?xml version="1.0" encoding="utf-8"?>
+<p:sld xmlns:a="http://schemas.openxmlformats.org/drawingml/2006/main" xmlns:r="http://schemas.openxmlformats.org/officeDocument/2006/relationships" xmlns:p="http://schemas.openxmlformats.org/presentationml/2006/main">
+  <p:cSld>
+    <p:spTree>
+      <p:nvGrpSpPr>
+        <p:cNvPr id="1" name=""/>
+        <p:cNvGrpSpPr/>
+        <p:nvPr/>
+      </p:nvGrpSpPr>
+      <p:grpSpPr>
+        <a:xfrm>
+          <a:off x="0" y="0"/>
+          <a:ext cx="0" cy="0"/>
+          <a:chOff x="0" y="0"/>
+          <a:chExt cx="0" cy="0"/>
+        </a:xfrm>
+      </p:grpSpPr>
+      <p:sp>
+        <p:nvSpPr>
+          <p:cNvPr id="2" name="Title 1">
+            <a:extLst>
+              <a:ext uri="{FF2B5EF4-FFF2-40B4-BE49-F238E27FC236}">
+                <a16:creationId xmlns:a16="http://schemas.microsoft.com/office/drawing/2014/main" id="{7155A263-5610-8325-1962-01E9C5E4BC22}"/>
+              </a:ext>
+            </a:extLst>
+          </p:cNvPr>
+          <p:cNvSpPr>
+            <a:spLocks noGrp="1"/>
+          </p:cNvSpPr>
+          <p:nvPr>
+            <p:ph type="title"/>
+          </p:nvPr>
+        </p:nvSpPr>
+        <p:spPr/>
+        <p:txBody>
+          <a:bodyPr/>
+          <a:lstStyle/>
+          <a:p>
+            <a:r>
+              <a:rPr lang="en-US" dirty="0"/>
+              <a:t>Application Registry - </a:t>
+            </a:r>
+            <a:r>
+              <a:rPr lang="en-US" dirty="0" err="1"/>
+              <a:t>Oauth</a:t>
+            </a:r>
+            <a:r>
+              <a:rPr lang="en-US" dirty="0"/>
+              <a:t> Client Setup</a:t>
+            </a:r>
+          </a:p>
+        </p:txBody>
+      </p:sp>
+      <p:sp>
+        <p:nvSpPr>
+          <p:cNvPr id="3" name="Content Placeholder 2">
+            <a:extLst>
+              <a:ext uri="{FF2B5EF4-FFF2-40B4-BE49-F238E27FC236}">
+                <a16:creationId xmlns:a16="http://schemas.microsoft.com/office/drawing/2014/main" id="{BBDFD3CB-B2C4-1F4F-6910-84500C0E8555}"/>
+              </a:ext>
+            </a:extLst>
+          </p:cNvPr>
+          <p:cNvSpPr>
+            <a:spLocks noGrp="1"/>
+          </p:cNvSpPr>
+          <p:nvPr>
+            <p:ph idx="1"/>
+          </p:nvPr>
+        </p:nvSpPr>
+        <p:spPr>
+          <a:xfrm>
+            <a:off x="581193" y="2180495"/>
+            <a:ext cx="3620694" cy="3975349"/>
+          </a:xfrm>
+        </p:spPr>
+        <p:txBody>
+          <a:bodyPr/>
+          <a:lstStyle/>
+          <a:p>
+            <a:r>
+              <a:rPr lang="en-US" dirty="0" err="1"/>
+              <a:t>RedirectURL</a:t>
+            </a:r>
+            <a:r>
+              <a:rPr lang="en-US" dirty="0"/>
+              <a:t> – the URL that ServiceNow will direct the client to while sending the authorization token (Part 2 of the PKCE Auth Flow)</a:t>
+            </a:r>
+          </a:p>
+          <a:p>
+            <a:r>
+              <a:rPr lang="en-US" dirty="0"/>
+              <a:t>Client ID/Secret – used in authentication steps </a:t>
+            </a:r>
+          </a:p>
+          <a:p>
+            <a:r>
+              <a:rPr lang="en-US" dirty="0"/>
+              <a:t>This is a public client – required to use the PKCE flow </a:t>
+            </a:r>
+          </a:p>
+        </p:txBody>
+      </p:sp>
+      <p:pic>
+        <p:nvPicPr>
+          <p:cNvPr id="5" name="Picture 4">
+            <a:extLst>
+              <a:ext uri="{FF2B5EF4-FFF2-40B4-BE49-F238E27FC236}">
+                <a16:creationId xmlns:a16="http://schemas.microsoft.com/office/drawing/2014/main" id="{D3BB9DA1-79C1-75EB-2BB2-893087415940}"/>
+              </a:ext>
+            </a:extLst>
+          </p:cNvPr>
+          <p:cNvPicPr>
+            <a:picLocks noChangeAspect="1"/>
+          </p:cNvPicPr>
+          <p:nvPr/>
+        </p:nvPicPr>
+        <p:blipFill>
+          <a:blip r:embed="rId2"/>
+          <a:stretch>
+            <a:fillRect/>
+          </a:stretch>
+        </p:blipFill>
+        <p:spPr>
+          <a:xfrm>
+            <a:off x="4419598" y="2278467"/>
+            <a:ext cx="7506893" cy="3711462"/>
+          </a:xfrm>
+          <a:prstGeom prst="rect">
+            <a:avLst/>
+          </a:prstGeom>
+        </p:spPr>
+      </p:pic>
+    </p:spTree>
+    <p:extLst>
+      <p:ext uri="{BB962C8B-B14F-4D97-AF65-F5344CB8AC3E}">
+        <p14:creationId xmlns:p14="http://schemas.microsoft.com/office/powerpoint/2010/main" val="2947899421"/>
+      </p:ext>
+    </p:extLst>
+  </p:cSld>
+  <p:clrMapOvr>
+    <a:masterClrMapping/>
+  </p:clrMapOvr>
+</p:sld>
+</file>
+
+<file path=ppt/slides/slide21.xml><?xml version="1.0" encoding="utf-8"?>
 <p:sld xmlns:a="http://schemas.openxmlformats.org/drawingml/2006/main" xmlns:r="http://schemas.openxmlformats.org/officeDocument/2006/relationships" xmlns:p="http://schemas.openxmlformats.org/presentationml/2006/main">
   <p:cSld>
     <p:spTree>
@@ -8139,6 +8308,139 @@
   <p:cSld>
     <p:spTree>
       <p:nvGrpSpPr>
+        <p:cNvPr id="1" name=""/>
+        <p:cNvGrpSpPr/>
+        <p:nvPr/>
+      </p:nvGrpSpPr>
+      <p:grpSpPr>
+        <a:xfrm>
+          <a:off x="0" y="0"/>
+          <a:ext cx="0" cy="0"/>
+          <a:chOff x="0" y="0"/>
+          <a:chExt cx="0" cy="0"/>
+        </a:xfrm>
+      </p:grpSpPr>
+      <p:sp>
+        <p:nvSpPr>
+          <p:cNvPr id="2" name="Title 1">
+            <a:extLst>
+              <a:ext uri="{FF2B5EF4-FFF2-40B4-BE49-F238E27FC236}">
+                <a16:creationId xmlns:a16="http://schemas.microsoft.com/office/drawing/2014/main" id="{81A9CCFE-2D11-D8C0-A4B8-0688CFE59389}"/>
+              </a:ext>
+            </a:extLst>
+          </p:cNvPr>
+          <p:cNvSpPr>
+            <a:spLocks noGrp="1"/>
+          </p:cNvSpPr>
+          <p:nvPr>
+            <p:ph type="title"/>
+          </p:nvPr>
+        </p:nvSpPr>
+        <p:spPr/>
+        <p:txBody>
+          <a:bodyPr/>
+          <a:lstStyle/>
+          <a:p>
+            <a:r>
+              <a:rPr lang="en-US" dirty="0"/>
+              <a:t>Using SOAP UI To test</a:t>
+            </a:r>
+          </a:p>
+        </p:txBody>
+      </p:sp>
+      <p:sp>
+        <p:nvSpPr>
+          <p:cNvPr id="3" name="Content Placeholder 2">
+            <a:extLst>
+              <a:ext uri="{FF2B5EF4-FFF2-40B4-BE49-F238E27FC236}">
+                <a16:creationId xmlns:a16="http://schemas.microsoft.com/office/drawing/2014/main" id="{4F7879C7-5EF4-E266-1332-B1E8F6644AE4}"/>
+              </a:ext>
+            </a:extLst>
+          </p:cNvPr>
+          <p:cNvSpPr>
+            <a:spLocks noGrp="1"/>
+          </p:cNvSpPr>
+          <p:nvPr>
+            <p:ph idx="1"/>
+          </p:nvPr>
+        </p:nvSpPr>
+        <p:spPr>
+          <a:xfrm>
+            <a:off x="581192" y="2180496"/>
+            <a:ext cx="3716488" cy="4083144"/>
+          </a:xfrm>
+        </p:spPr>
+        <p:txBody>
+          <a:bodyPr/>
+          <a:lstStyle/>
+          <a:p>
+            <a:r>
+              <a:rPr lang="en-US" dirty="0"/>
+              <a:t>We can use SOAP UI to test our service</a:t>
+            </a:r>
+          </a:p>
+          <a:p>
+            <a:r>
+              <a:rPr lang="en-US" dirty="0"/>
+              <a:t>Create an integration user, click the checkbox for it*, and give them the ‘soap’ user role</a:t>
+            </a:r>
+          </a:p>
+          <a:p>
+            <a:r>
+              <a:rPr lang="en-US" dirty="0"/>
+              <a:t>We can use their username/password to authenticate the request in SOAP UI</a:t>
+            </a:r>
+          </a:p>
+        </p:txBody>
+      </p:sp>
+      <p:pic>
+        <p:nvPicPr>
+          <p:cNvPr id="5" name="Picture 4">
+            <a:extLst>
+              <a:ext uri="{FF2B5EF4-FFF2-40B4-BE49-F238E27FC236}">
+                <a16:creationId xmlns:a16="http://schemas.microsoft.com/office/drawing/2014/main" id="{954A4535-B85A-C4A3-878E-8EAEDBE7292B}"/>
+              </a:ext>
+            </a:extLst>
+          </p:cNvPr>
+          <p:cNvPicPr>
+            <a:picLocks noChangeAspect="1"/>
+          </p:cNvPicPr>
+          <p:nvPr/>
+        </p:nvPicPr>
+        <p:blipFill>
+          <a:blip r:embed="rId2"/>
+          <a:stretch>
+            <a:fillRect/>
+          </a:stretch>
+        </p:blipFill>
+        <p:spPr>
+          <a:xfrm>
+            <a:off x="4567299" y="2090728"/>
+            <a:ext cx="7277144" cy="4253883"/>
+          </a:xfrm>
+          <a:prstGeom prst="rect">
+            <a:avLst/>
+          </a:prstGeom>
+        </p:spPr>
+      </p:pic>
+    </p:spTree>
+    <p:extLst>
+      <p:ext uri="{BB962C8B-B14F-4D97-AF65-F5344CB8AC3E}">
+        <p14:creationId xmlns:p14="http://schemas.microsoft.com/office/powerpoint/2010/main" val="2070306931"/>
+      </p:ext>
+    </p:extLst>
+  </p:cSld>
+  <p:clrMapOvr>
+    <a:masterClrMapping/>
+  </p:clrMapOvr>
+</p:sld>
+</file>
+
+<file path=ppt/slides/slide9.xml><?xml version="1.0" encoding="utf-8"?>
+<p:sld xmlns:a="http://schemas.openxmlformats.org/drawingml/2006/main" xmlns:r="http://schemas.openxmlformats.org/officeDocument/2006/relationships" xmlns:p="http://schemas.openxmlformats.org/presentationml/2006/main">
+  <p:cSld>
+    <p:spTree>
+      <p:nvGrpSpPr>
         <p:cNvPr id="1" name="">
           <a:extLst>
             <a:ext uri="{FF2B5EF4-FFF2-40B4-BE49-F238E27FC236}">
@@ -8486,174 +8788,6 @@
     <p:extLst>
       <p:ext uri="{BB962C8B-B14F-4D97-AF65-F5344CB8AC3E}">
         <p14:creationId xmlns:p14="http://schemas.microsoft.com/office/powerpoint/2010/main" val="716592862"/>
-      </p:ext>
-    </p:extLst>
-  </p:cSld>
-  <p:clrMapOvr>
-    <a:masterClrMapping/>
-  </p:clrMapOvr>
-</p:sld>
-</file>
-
-<file path=ppt/slides/slide9.xml><?xml version="1.0" encoding="utf-8"?>
-<p:sld xmlns:a="http://schemas.openxmlformats.org/drawingml/2006/main" xmlns:r="http://schemas.openxmlformats.org/officeDocument/2006/relationships" xmlns:p="http://schemas.openxmlformats.org/presentationml/2006/main">
-  <p:cSld>
-    <p:spTree>
-      <p:nvGrpSpPr>
-        <p:cNvPr id="1" name=""/>
-        <p:cNvGrpSpPr/>
-        <p:nvPr/>
-      </p:nvGrpSpPr>
-      <p:grpSpPr>
-        <a:xfrm>
-          <a:off x="0" y="0"/>
-          <a:ext cx="0" cy="0"/>
-          <a:chOff x="0" y="0"/>
-          <a:chExt cx="0" cy="0"/>
-        </a:xfrm>
-      </p:grpSpPr>
-      <p:sp>
-        <p:nvSpPr>
-          <p:cNvPr id="2" name="Title 1">
-            <a:extLst>
-              <a:ext uri="{FF2B5EF4-FFF2-40B4-BE49-F238E27FC236}">
-                <a16:creationId xmlns:a16="http://schemas.microsoft.com/office/drawing/2014/main" id="{F0A3B712-7B9A-FC09-C8C1-F468C2F35495}"/>
-              </a:ext>
-            </a:extLst>
-          </p:cNvPr>
-          <p:cNvSpPr>
-            <a:spLocks noGrp="1"/>
-          </p:cNvSpPr>
-          <p:nvPr>
-            <p:ph type="title"/>
-          </p:nvPr>
-        </p:nvSpPr>
-        <p:spPr/>
-        <p:txBody>
-          <a:bodyPr/>
-          <a:lstStyle/>
-          <a:p>
-            <a:r>
-              <a:rPr lang="en-US" dirty="0" err="1"/>
-              <a:t>IntegrationHub</a:t>
-            </a:r>
-            <a:r>
-              <a:rPr lang="en-US" dirty="0"/>
-              <a:t> Enterprise License - REST API Trigger</a:t>
-            </a:r>
-          </a:p>
-        </p:txBody>
-      </p:sp>
-      <p:pic>
-        <p:nvPicPr>
-          <p:cNvPr id="5" name="Picture 4">
-            <a:extLst>
-              <a:ext uri="{FF2B5EF4-FFF2-40B4-BE49-F238E27FC236}">
-                <a16:creationId xmlns:a16="http://schemas.microsoft.com/office/drawing/2014/main" id="{7A9C53E6-7E2C-620C-C11D-DDE603E1E587}"/>
-              </a:ext>
-            </a:extLst>
-          </p:cNvPr>
-          <p:cNvPicPr>
-            <a:picLocks noChangeAspect="1"/>
-          </p:cNvPicPr>
-          <p:nvPr/>
-        </p:nvPicPr>
-        <p:blipFill>
-          <a:blip r:embed="rId2"/>
-          <a:stretch>
-            <a:fillRect/>
-          </a:stretch>
-        </p:blipFill>
-        <p:spPr>
-          <a:xfrm>
-            <a:off x="3676967" y="2111829"/>
-            <a:ext cx="8221118" cy="4306300"/>
-          </a:xfrm>
-          <a:prstGeom prst="rect">
-            <a:avLst/>
-          </a:prstGeom>
-        </p:spPr>
-      </p:pic>
-      <p:sp>
-        <p:nvSpPr>
-          <p:cNvPr id="6" name="TextBox 5">
-            <a:extLst>
-              <a:ext uri="{FF2B5EF4-FFF2-40B4-BE49-F238E27FC236}">
-                <a16:creationId xmlns:a16="http://schemas.microsoft.com/office/drawing/2014/main" id="{60726007-289D-54DD-7CCD-1B23C8EB48D5}"/>
-              </a:ext>
-            </a:extLst>
-          </p:cNvPr>
-          <p:cNvSpPr txBox="1"/>
-          <p:nvPr/>
-        </p:nvSpPr>
-        <p:spPr>
-          <a:xfrm>
-            <a:off x="457200" y="2778501"/>
-            <a:ext cx="2950029" cy="1754326"/>
-          </a:xfrm>
-          <a:prstGeom prst="rect">
-            <a:avLst/>
-          </a:prstGeom>
-          <a:noFill/>
-        </p:spPr>
-        <p:txBody>
-          <a:bodyPr wrap="square" rtlCol="0">
-            <a:spAutoFit/>
-          </a:bodyPr>
-          <a:lstStyle/>
-          <a:p>
-            <a:pPr marL="285750" indent="-285750">
-              <a:buClr>
-                <a:schemeClr val="accent2"/>
-              </a:buClr>
-              <a:buFont typeface="Wingdings" panose="05000000000000000000" pitchFamily="2" charset="2"/>
-              <a:buChar char="§"/>
-            </a:pPr>
-            <a:r>
-              <a:rPr lang="en-US" dirty="0"/>
-              <a:t>Requires </a:t>
-            </a:r>
-            <a:r>
-              <a:rPr lang="en-US" dirty="0" err="1"/>
-              <a:t>IntegrationHub</a:t>
-            </a:r>
-            <a:r>
-              <a:rPr lang="en-US" dirty="0"/>
-              <a:t> Enterprise License</a:t>
-            </a:r>
-          </a:p>
-          <a:p>
-            <a:pPr marL="742950" lvl="1" indent="-285750">
-              <a:buClr>
-                <a:schemeClr val="accent2"/>
-              </a:buClr>
-              <a:buFont typeface="Wingdings" panose="05000000000000000000" pitchFamily="2" charset="2"/>
-              <a:buChar char="§"/>
-            </a:pPr>
-            <a:r>
-              <a:rPr lang="en-US" dirty="0"/>
-              <a:t>Install from developer site for PDIs</a:t>
-            </a:r>
-          </a:p>
-          <a:p>
-            <a:pPr marL="285750" indent="-285750">
-              <a:buClr>
-                <a:schemeClr val="accent2"/>
-              </a:buClr>
-              <a:buFont typeface="Wingdings" panose="05000000000000000000" pitchFamily="2" charset="2"/>
-              <a:buChar char="§"/>
-            </a:pPr>
-            <a:r>
-              <a:rPr lang="en-US" dirty="0"/>
-              <a:t>Launch Flows from a REST request</a:t>
-            </a:r>
-          </a:p>
-        </p:txBody>
-      </p:sp>
-    </p:spTree>
-    <p:extLst>
-      <p:ext uri="{BB962C8B-B14F-4D97-AF65-F5344CB8AC3E}">
-        <p14:creationId xmlns:p14="http://schemas.microsoft.com/office/powerpoint/2010/main" val="1486957363"/>
       </p:ext>
     </p:extLst>
   </p:cSld>

--- a/Week_7/Integrations.pptx
+++ b/Week_7/Integrations.pptx
@@ -8164,10 +8164,10 @@
       </p:sp>
       <p:pic>
         <p:nvPicPr>
-          <p:cNvPr id="5" name="Picture 4">
+          <p:cNvPr id="8" name="Picture 7">
             <a:extLst>
               <a:ext uri="{FF2B5EF4-FFF2-40B4-BE49-F238E27FC236}">
-                <a16:creationId xmlns:a16="http://schemas.microsoft.com/office/drawing/2014/main" id="{94875F68-9F64-8956-FD64-7BC23C9AA5EA}"/>
+                <a16:creationId xmlns:a16="http://schemas.microsoft.com/office/drawing/2014/main" id="{91304312-F3AB-0D3A-C0BB-E9E35BE21E6B}"/>
               </a:ext>
             </a:extLst>
           </p:cNvPr>
@@ -8184,20 +8184,88 @@
         </p:blipFill>
         <p:spPr>
           <a:xfrm>
-            <a:off x="4892739" y="1935136"/>
-            <a:ext cx="6491460" cy="4675163"/>
+            <a:off x="1081356" y="4381138"/>
+            <a:ext cx="3124636" cy="2229161"/>
           </a:xfrm>
           <a:prstGeom prst="rect">
             <a:avLst/>
           </a:prstGeom>
         </p:spPr>
       </p:pic>
+      <p:sp>
+        <p:nvSpPr>
+          <p:cNvPr id="9" name="TextBox 8">
+            <a:extLst>
+              <a:ext uri="{FF2B5EF4-FFF2-40B4-BE49-F238E27FC236}">
+                <a16:creationId xmlns:a16="http://schemas.microsoft.com/office/drawing/2014/main" id="{EC1E3C06-6008-CC47-A248-BB646797BC07}"/>
+              </a:ext>
+            </a:extLst>
+          </p:cNvPr>
+          <p:cNvSpPr txBox="1"/>
+          <p:nvPr/>
+        </p:nvSpPr>
+        <p:spPr>
+          <a:xfrm>
+            <a:off x="581192" y="2263763"/>
+            <a:ext cx="3760237" cy="1754326"/>
+          </a:xfrm>
+          <a:prstGeom prst="rect">
+            <a:avLst/>
+          </a:prstGeom>
+          <a:noFill/>
+        </p:spPr>
+        <p:txBody>
+          <a:bodyPr wrap="square" rtlCol="0">
+            <a:spAutoFit/>
+          </a:bodyPr>
+          <a:lstStyle/>
+          <a:p>
+            <a:pPr marL="285750" indent="-285750">
+              <a:buClr>
+                <a:schemeClr val="accent2"/>
+              </a:buClr>
+              <a:buFont typeface="Wingdings" panose="05000000000000000000" pitchFamily="2" charset="2"/>
+              <a:buChar char="§"/>
+            </a:pPr>
+            <a:r>
+              <a:rPr lang="en-US" dirty="0"/>
+              <a:t>We must set input/output parameters in the related lists</a:t>
+            </a:r>
+          </a:p>
+          <a:p>
+            <a:pPr marL="285750" indent="-285750">
+              <a:buClr>
+                <a:schemeClr val="accent2"/>
+              </a:buClr>
+              <a:buFont typeface="Wingdings" panose="05000000000000000000" pitchFamily="2" charset="2"/>
+              <a:buChar char="§"/>
+            </a:pPr>
+            <a:r>
+              <a:rPr lang="en-US" dirty="0"/>
+              <a:t>Make sure you authenticate users by checking roles</a:t>
+            </a:r>
+          </a:p>
+          <a:p>
+            <a:pPr marL="285750" indent="-285750">
+              <a:buClr>
+                <a:schemeClr val="accent2"/>
+              </a:buClr>
+              <a:buFont typeface="Wingdings" panose="05000000000000000000" pitchFamily="2" charset="2"/>
+              <a:buChar char="§"/>
+            </a:pPr>
+            <a:r>
+              <a:rPr lang="en-US" dirty="0"/>
+              <a:t>The generated WSDL file is shared to consumers</a:t>
+            </a:r>
+          </a:p>
+        </p:txBody>
+      </p:sp>
       <p:pic>
         <p:nvPicPr>
-          <p:cNvPr id="8" name="Picture 7">
+          <p:cNvPr id="7" name="Picture 6">
             <a:extLst>
               <a:ext uri="{FF2B5EF4-FFF2-40B4-BE49-F238E27FC236}">
-                <a16:creationId xmlns:a16="http://schemas.microsoft.com/office/drawing/2014/main" id="{91304312-F3AB-0D3A-C0BB-E9E35BE21E6B}"/>
+                <a16:creationId xmlns:a16="http://schemas.microsoft.com/office/drawing/2014/main" id="{BF9B0353-DF0A-B844-7CD7-06FFACB92A2B}"/>
               </a:ext>
             </a:extLst>
           </p:cNvPr>
@@ -8214,82 +8282,14 @@
         </p:blipFill>
         <p:spPr>
           <a:xfrm>
-            <a:off x="1081356" y="4381138"/>
-            <a:ext cx="3124636" cy="2229161"/>
+            <a:off x="4469042" y="1953275"/>
+            <a:ext cx="7356957" cy="4403183"/>
           </a:xfrm>
           <a:prstGeom prst="rect">
             <a:avLst/>
           </a:prstGeom>
         </p:spPr>
       </p:pic>
-      <p:sp>
-        <p:nvSpPr>
-          <p:cNvPr id="9" name="TextBox 8">
-            <a:extLst>
-              <a:ext uri="{FF2B5EF4-FFF2-40B4-BE49-F238E27FC236}">
-                <a16:creationId xmlns:a16="http://schemas.microsoft.com/office/drawing/2014/main" id="{EC1E3C06-6008-CC47-A248-BB646797BC07}"/>
-              </a:ext>
-            </a:extLst>
-          </p:cNvPr>
-          <p:cNvSpPr txBox="1"/>
-          <p:nvPr/>
-        </p:nvSpPr>
-        <p:spPr>
-          <a:xfrm>
-            <a:off x="581192" y="2263763"/>
-            <a:ext cx="3760237" cy="1754326"/>
-          </a:xfrm>
-          <a:prstGeom prst="rect">
-            <a:avLst/>
-          </a:prstGeom>
-          <a:noFill/>
-        </p:spPr>
-        <p:txBody>
-          <a:bodyPr wrap="square" rtlCol="0">
-            <a:spAutoFit/>
-          </a:bodyPr>
-          <a:lstStyle/>
-          <a:p>
-            <a:pPr marL="285750" indent="-285750">
-              <a:buClr>
-                <a:schemeClr val="accent2"/>
-              </a:buClr>
-              <a:buFont typeface="Wingdings" panose="05000000000000000000" pitchFamily="2" charset="2"/>
-              <a:buChar char="§"/>
-            </a:pPr>
-            <a:r>
-              <a:rPr lang="en-US" dirty="0"/>
-              <a:t>We must set input/output parameters in the related lists</a:t>
-            </a:r>
-          </a:p>
-          <a:p>
-            <a:pPr marL="285750" indent="-285750">
-              <a:buClr>
-                <a:schemeClr val="accent2"/>
-              </a:buClr>
-              <a:buFont typeface="Wingdings" panose="05000000000000000000" pitchFamily="2" charset="2"/>
-              <a:buChar char="§"/>
-            </a:pPr>
-            <a:r>
-              <a:rPr lang="en-US" dirty="0"/>
-              <a:t>Make sure you authenticate users by checking roles</a:t>
-            </a:r>
-          </a:p>
-          <a:p>
-            <a:pPr marL="285750" indent="-285750">
-              <a:buClr>
-                <a:schemeClr val="accent2"/>
-              </a:buClr>
-              <a:buFont typeface="Wingdings" panose="05000000000000000000" pitchFamily="2" charset="2"/>
-              <a:buChar char="§"/>
-            </a:pPr>
-            <a:r>
-              <a:rPr lang="en-US" dirty="0"/>
-              <a:t>The generated WSDL file is shared to consumers</a:t>
-            </a:r>
-          </a:p>
-        </p:txBody>
-      </p:sp>
     </p:spTree>
     <p:extLst>
       <p:ext uri="{BB962C8B-B14F-4D97-AF65-F5344CB8AC3E}">

--- a/Week_7/Integrations.pptx
+++ b/Week_7/Integrations.pptx
@@ -5,7 +5,7 @@
     <p:sldMasterId id="2147483684" r:id="rId1"/>
   </p:sldMasterIdLst>
   <p:notesMasterIdLst>
-    <p:notesMasterId r:id="rId23"/>
+    <p:notesMasterId r:id="rId27"/>
   </p:notesMasterIdLst>
   <p:sldIdLst>
     <p:sldId id="380" r:id="rId2"/>
@@ -29,6 +29,10 @@
     <p:sldId id="434" r:id="rId20"/>
     <p:sldId id="427" r:id="rId21"/>
     <p:sldId id="432" r:id="rId22"/>
+    <p:sldId id="440" r:id="rId23"/>
+    <p:sldId id="441" r:id="rId24"/>
+    <p:sldId id="442" r:id="rId25"/>
+    <p:sldId id="443" r:id="rId26"/>
   </p:sldIdLst>
   <p:sldSz cx="12192000" cy="6858000"/>
   <p:notesSz cx="6858000" cy="9144000"/>
@@ -706,6 +710,117 @@
     <p:extLst>
       <p:ext uri="{BB962C8B-B14F-4D97-AF65-F5344CB8AC3E}">
         <p14:creationId xmlns:p14="http://schemas.microsoft.com/office/powerpoint/2010/main" val="3062650777"/>
+      </p:ext>
+    </p:extLst>
+  </p:cSld>
+  <p:clrMapOvr>
+    <a:masterClrMapping/>
+  </p:clrMapOvr>
+</p:notes>
+</file>
+
+<file path=ppt/notesSlides/notesSlide3.xml><?xml version="1.0" encoding="utf-8"?>
+<p:notes xmlns:a="http://schemas.openxmlformats.org/drawingml/2006/main" xmlns:r="http://schemas.openxmlformats.org/officeDocument/2006/relationships" xmlns:p="http://schemas.openxmlformats.org/presentationml/2006/main">
+  <p:cSld>
+    <p:spTree>
+      <p:nvGrpSpPr>
+        <p:cNvPr id="1" name="">
+          <a:extLst>
+            <a:ext uri="{FF2B5EF4-FFF2-40B4-BE49-F238E27FC236}">
+              <a16:creationId xmlns:a16="http://schemas.microsoft.com/office/drawing/2014/main" id="{129D56F4-8FFD-F010-9866-421F7700EF8C}"/>
+            </a:ext>
+          </a:extLst>
+        </p:cNvPr>
+        <p:cNvGrpSpPr/>
+        <p:nvPr/>
+      </p:nvGrpSpPr>
+      <p:grpSpPr>
+        <a:xfrm>
+          <a:off x="0" y="0"/>
+          <a:ext cx="0" cy="0"/>
+          <a:chOff x="0" y="0"/>
+          <a:chExt cx="0" cy="0"/>
+        </a:xfrm>
+      </p:grpSpPr>
+      <p:sp>
+        <p:nvSpPr>
+          <p:cNvPr id="2" name="Slide Image Placeholder 1">
+            <a:extLst>
+              <a:ext uri="{FF2B5EF4-FFF2-40B4-BE49-F238E27FC236}">
+                <a16:creationId xmlns:a16="http://schemas.microsoft.com/office/drawing/2014/main" id="{A65E4B36-3E28-2C67-4212-7D03B5D342F2}"/>
+              </a:ext>
+            </a:extLst>
+          </p:cNvPr>
+          <p:cNvSpPr>
+            <a:spLocks noGrp="1" noRot="1" noChangeAspect="1"/>
+          </p:cNvSpPr>
+          <p:nvPr>
+            <p:ph type="sldImg"/>
+          </p:nvPr>
+        </p:nvSpPr>
+        <p:spPr/>
+      </p:sp>
+      <p:sp>
+        <p:nvSpPr>
+          <p:cNvPr id="3" name="Notes Placeholder 2">
+            <a:extLst>
+              <a:ext uri="{FF2B5EF4-FFF2-40B4-BE49-F238E27FC236}">
+                <a16:creationId xmlns:a16="http://schemas.microsoft.com/office/drawing/2014/main" id="{EB528A7B-FE2A-7532-3776-C3B8A17548B9}"/>
+              </a:ext>
+            </a:extLst>
+          </p:cNvPr>
+          <p:cNvSpPr>
+            <a:spLocks noGrp="1"/>
+          </p:cNvSpPr>
+          <p:nvPr>
+            <p:ph type="body" idx="1"/>
+          </p:nvPr>
+        </p:nvSpPr>
+        <p:spPr/>
+        <p:txBody>
+          <a:bodyPr/>
+          <a:lstStyle/>
+          <a:p>
+            <a:r>
+              <a:rPr lang="en-US" dirty="0"/>
+              <a:t>UI Policy = because the tool’s main purpose is to make fields required, read-only, or mandatory, and it does that job well without needing any code </a:t>
+            </a:r>
+          </a:p>
+        </p:txBody>
+      </p:sp>
+      <p:sp>
+        <p:nvSpPr>
+          <p:cNvPr id="4" name="Slide Number Placeholder 3">
+            <a:extLst>
+              <a:ext uri="{FF2B5EF4-FFF2-40B4-BE49-F238E27FC236}">
+                <a16:creationId xmlns:a16="http://schemas.microsoft.com/office/drawing/2014/main" id="{B6DC7BFC-ABB4-17BB-CFAA-D9E1AF00FCB9}"/>
+              </a:ext>
+            </a:extLst>
+          </p:cNvPr>
+          <p:cNvSpPr>
+            <a:spLocks noGrp="1"/>
+          </p:cNvSpPr>
+          <p:nvPr>
+            <p:ph type="sldNum" sz="quarter" idx="5"/>
+          </p:nvPr>
+        </p:nvSpPr>
+        <p:spPr/>
+        <p:txBody>
+          <a:bodyPr/>
+          <a:lstStyle/>
+          <a:p>
+            <a:fld id="{36C040E7-12E1-4E9C-B024-3505840C3DA3}" type="slidenum">
+              <a:rPr lang="en-US" smtClean="0"/>
+              <a:t>25</a:t>
+            </a:fld>
+            <a:endParaRPr lang="en-US"/>
+          </a:p>
+        </p:txBody>
+      </p:sp>
+    </p:spTree>
+    <p:extLst>
+      <p:ext uri="{BB962C8B-B14F-4D97-AF65-F5344CB8AC3E}">
+        <p14:creationId xmlns:p14="http://schemas.microsoft.com/office/powerpoint/2010/main" val="3672188369"/>
       </p:ext>
     </p:extLst>
   </p:cSld>
@@ -7251,7 +7366,7 @@
 </p:sld>
 </file>
 
-<file path=ppt/slides/slide3.xml><?xml version="1.0" encoding="utf-8"?>
+<file path=ppt/slides/slide22.xml><?xml version="1.0" encoding="utf-8"?>
 <p:sld xmlns:a="http://schemas.openxmlformats.org/drawingml/2006/main" xmlns:r="http://schemas.openxmlformats.org/officeDocument/2006/relationships" xmlns:p="http://schemas.openxmlformats.org/presentationml/2006/main">
   <p:cSld>
     <p:spTree>
@@ -7273,7 +7388,7 @@
           <p:cNvPr id="2" name="Title 1">
             <a:extLst>
               <a:ext uri="{FF2B5EF4-FFF2-40B4-BE49-F238E27FC236}">
-                <a16:creationId xmlns:a16="http://schemas.microsoft.com/office/drawing/2014/main" id="{82DCA843-AABC-E7C6-10E8-2FA45334482E}"/>
+                <a16:creationId xmlns:a16="http://schemas.microsoft.com/office/drawing/2014/main" id="{9D66A254-8648-4B0D-B8B8-CB81BB8CE3CC}"/>
               </a:ext>
             </a:extLst>
           </p:cNvPr>
@@ -7291,7 +7406,7 @@
           <a:p>
             <a:r>
               <a:rPr lang="en-US" dirty="0"/>
-              <a:t>Inbound Options</a:t>
+              <a:t>Outbound Options</a:t>
             </a:r>
           </a:p>
         </p:txBody>
@@ -7301,7 +7416,7 @@
           <p:cNvPr id="3" name="Content Placeholder 2">
             <a:extLst>
               <a:ext uri="{FF2B5EF4-FFF2-40B4-BE49-F238E27FC236}">
-                <a16:creationId xmlns:a16="http://schemas.microsoft.com/office/drawing/2014/main" id="{107FBFBF-6605-B2E4-F7A7-CD5E5ED580DB}"/>
+                <a16:creationId xmlns:a16="http://schemas.microsoft.com/office/drawing/2014/main" id="{4BBC9E39-126A-4509-ACAD-C16F396D1B93}"/>
               </a:ext>
             </a:extLst>
           </p:cNvPr>
@@ -7314,105 +7429,61 @@
         </p:nvSpPr>
         <p:spPr>
           <a:xfrm>
-            <a:off x="581191" y="1995439"/>
-            <a:ext cx="11029615" cy="4481561"/>
+            <a:off x="581192" y="2180497"/>
+            <a:ext cx="11029615" cy="4071013"/>
           </a:xfrm>
         </p:spPr>
         <p:txBody>
           <a:bodyPr>
-            <a:normAutofit lnSpcReduction="10000"/>
+            <a:normAutofit/>
           </a:bodyPr>
           <a:lstStyle/>
           <a:p>
             <a:r>
               <a:rPr lang="en-US" dirty="0"/>
-              <a:t>REST APIs</a:t>
+              <a:t>Outbound REST Messages – call external REST APIs from ServiceNow</a:t>
             </a:r>
           </a:p>
           <a:p>
             <a:pPr lvl="1"/>
             <a:r>
               <a:rPr lang="en-US" dirty="0"/>
-              <a:t>REST API Explorer – discover and test ServiceNow’s REST APIs</a:t>
+              <a:t>Configured at: System Web Services &gt; Outbound &gt; Rest Message</a:t>
             </a:r>
           </a:p>
           <a:p>
             <a:pPr lvl="1"/>
             <a:r>
               <a:rPr lang="en-US" dirty="0"/>
-              <a:t>Scripted REST APIs – build your own endpoints with custom logic </a:t>
-            </a:r>
-          </a:p>
-          <a:p>
-            <a:r>
-              <a:rPr lang="en-US" dirty="0"/>
-              <a:t>SOAP APIs</a:t>
-            </a:r>
-          </a:p>
-          <a:p>
-            <a:pPr lvl="1"/>
-            <a:r>
-              <a:rPr lang="en-US" dirty="0"/>
-              <a:t> Scripted SOAP APIs – build your own SOAP endpoints with custom logic</a:t>
-            </a:r>
-          </a:p>
-          <a:p>
-            <a:r>
-              <a:rPr lang="en-US" dirty="0"/>
-              <a:t>Import Sets – batch or schedule data imports into ServiceNow tables (REST – </a:t>
-            </a:r>
+              <a:t>Can be called from scripts </a:t>
+            </a:r>
+          </a:p>
+          <a:p>
+            <a:r>
+              <a:rPr lang="en-US" dirty="0"/>
+              <a:t>Outbound SOAP Messages – communicate with SOAP-based external systems using XML and WSDL</a:t>
+            </a:r>
+          </a:p>
+          <a:p>
             <a:r>
               <a:rPr lang="en-US" dirty="0" err="1"/>
               <a:t>IntegrationHub</a:t>
             </a:r>
             <a:r>
               <a:rPr lang="en-US" dirty="0"/>
-              <a:t> option available)</a:t>
-            </a:r>
-          </a:p>
-          <a:p>
-            <a:r>
-              <a:rPr lang="en-US" dirty="0"/>
-              <a:t>Email Inbound Actions – use scripts to interpret received email and then create or update records </a:t>
-            </a:r>
-          </a:p>
-          <a:p>
-            <a:r>
-              <a:rPr lang="en-US" dirty="0" err="1"/>
-              <a:t>IntegrationHub</a:t>
-            </a:r>
-            <a:r>
-              <a:rPr lang="en-US" dirty="0"/>
-              <a:t> (Flow Designer) – use REST triggers to launch a flow from a REST request</a:t>
-            </a:r>
-          </a:p>
-          <a:p>
-            <a:r>
-              <a:rPr lang="en-US" dirty="0" err="1"/>
-              <a:t>IntegrationHub</a:t>
-            </a:r>
-            <a:r>
-              <a:rPr lang="en-US" dirty="0"/>
-              <a:t> (Import Tool) – schedule batched record imports from files or external systems</a:t>
-            </a:r>
-          </a:p>
-          <a:p>
-            <a:r>
-              <a:rPr lang="en-US" dirty="0"/>
-              <a:t>MID Server – bridge ServiceNow and on-premises systems</a:t>
-            </a:r>
-          </a:p>
-          <a:p>
-            <a:r>
-              <a:rPr lang="en-US" dirty="0"/>
-              <a:t>Application Registry – these records define our authentication scheme for OAuth 2.0 </a:t>
-            </a:r>
-          </a:p>
-          <a:p>
-            <a:pPr lvl="1"/>
-            <a:r>
-              <a:rPr lang="en-US" dirty="0"/>
-              <a:t>Any external system will need to pass through our Application Registry to get an authorization token and an access token</a:t>
+              <a:t> (Flow Designer) – use REST actions and script steps to call out to APIs</a:t>
+            </a:r>
+          </a:p>
+          <a:p>
+            <a:r>
+              <a:rPr lang="en-US" dirty="0"/>
+              <a:t>Outbound Email Notifications – send email messages from ServiceNow to users or external systems</a:t>
+            </a:r>
+          </a:p>
+          <a:p>
+            <a:r>
+              <a:rPr lang="en-US" dirty="0"/>
+              <a:t>Mid Server (Outbound bridge) – allows ServiceNow to communicate securely with on-premise or restricted systems </a:t>
             </a:r>
           </a:p>
         </p:txBody>
@@ -7420,7 +7491,7 @@
     </p:spTree>
     <p:extLst>
       <p:ext uri="{BB962C8B-B14F-4D97-AF65-F5344CB8AC3E}">
-        <p14:creationId xmlns:p14="http://schemas.microsoft.com/office/powerpoint/2010/main" val="742969173"/>
+        <p14:creationId xmlns:p14="http://schemas.microsoft.com/office/powerpoint/2010/main" val="4151860887"/>
       </p:ext>
     </p:extLst>
   </p:cSld>
@@ -7430,7 +7501,7 @@
 </p:sld>
 </file>
 
-<file path=ppt/slides/slide4.xml><?xml version="1.0" encoding="utf-8"?>
+<file path=ppt/slides/slide23.xml><?xml version="1.0" encoding="utf-8"?>
 <p:sld xmlns:a="http://schemas.openxmlformats.org/drawingml/2006/main" xmlns:r="http://schemas.openxmlformats.org/officeDocument/2006/relationships" xmlns:p="http://schemas.openxmlformats.org/presentationml/2006/main">
   <p:cSld>
     <p:spTree>
@@ -7452,7 +7523,7 @@
           <p:cNvPr id="2" name="Title 1">
             <a:extLst>
               <a:ext uri="{FF2B5EF4-FFF2-40B4-BE49-F238E27FC236}">
-                <a16:creationId xmlns:a16="http://schemas.microsoft.com/office/drawing/2014/main" id="{ACA295F1-E4E6-083B-7D0E-927228812788}"/>
+                <a16:creationId xmlns:a16="http://schemas.microsoft.com/office/drawing/2014/main" id="{B39B4CD4-D92F-B7B1-773F-C6749CA66234}"/>
               </a:ext>
             </a:extLst>
           </p:cNvPr>
@@ -7470,7 +7541,7 @@
           <a:p>
             <a:r>
               <a:rPr lang="en-US" dirty="0"/>
-              <a:t>REST API Explorer</a:t>
+              <a:t>Outbound Rest Messages</a:t>
             </a:r>
           </a:p>
         </p:txBody>
@@ -7480,7 +7551,7 @@
           <p:cNvPr id="3" name="Content Placeholder 2">
             <a:extLst>
               <a:ext uri="{FF2B5EF4-FFF2-40B4-BE49-F238E27FC236}">
-                <a16:creationId xmlns:a16="http://schemas.microsoft.com/office/drawing/2014/main" id="{E11F083F-F75B-F5B3-B8EC-6D960AA50EEB}"/>
+                <a16:creationId xmlns:a16="http://schemas.microsoft.com/office/drawing/2014/main" id="{5FD2FD0D-D077-4A22-A30F-3E55DC87256E}"/>
               </a:ext>
             </a:extLst>
           </p:cNvPr>
@@ -7493,25 +7564,25 @@
         </p:nvSpPr>
         <p:spPr>
           <a:xfrm>
-            <a:off x="2669124" y="1982560"/>
-            <a:ext cx="6853750" cy="796652"/>
+            <a:off x="3876661" y="2016001"/>
+            <a:ext cx="4438677" cy="628018"/>
           </a:xfrm>
         </p:spPr>
         <p:txBody>
           <a:bodyPr>
-            <a:normAutofit/>
+            <a:normAutofit fontScale="85000" lnSpcReduction="10000"/>
           </a:bodyPr>
           <a:lstStyle/>
           <a:p>
             <a:r>
               <a:rPr lang="en-US" dirty="0"/>
-              <a:t>Use the REST API Explorer to test REST endpoints on your instance</a:t>
-            </a:r>
-          </a:p>
-          <a:p>
-            <a:r>
-              <a:rPr lang="en-US" dirty="0"/>
-              <a:t>Offers guidance on how to construct requests</a:t>
+              <a:t>Create a message, add methods, and set headers</a:t>
+            </a:r>
+          </a:p>
+          <a:p>
+            <a:r>
+              <a:rPr lang="en-US" dirty="0"/>
+              <a:t>Call the Message via scripts</a:t>
             </a:r>
           </a:p>
         </p:txBody>
@@ -7521,7 +7592,7 @@
           <p:cNvPr id="5" name="Picture 4">
             <a:extLst>
               <a:ext uri="{FF2B5EF4-FFF2-40B4-BE49-F238E27FC236}">
-                <a16:creationId xmlns:a16="http://schemas.microsoft.com/office/drawing/2014/main" id="{B0B879BD-A38A-FD87-0C93-BF42548DE5AB}"/>
+                <a16:creationId xmlns:a16="http://schemas.microsoft.com/office/drawing/2014/main" id="{BE063863-6B1A-5781-BAC1-0AFC74FDADF8}"/>
               </a:ext>
             </a:extLst>
           </p:cNvPr>
@@ -7538,8 +7609,68 @@
         </p:blipFill>
         <p:spPr>
           <a:xfrm>
-            <a:off x="925916" y="2855412"/>
-            <a:ext cx="10340167" cy="3765998"/>
+            <a:off x="1491004" y="2947681"/>
+            <a:ext cx="3118317" cy="2526365"/>
+          </a:xfrm>
+          <a:prstGeom prst="rect">
+            <a:avLst/>
+          </a:prstGeom>
+        </p:spPr>
+      </p:pic>
+      <p:pic>
+        <p:nvPicPr>
+          <p:cNvPr id="7" name="Picture 6">
+            <a:extLst>
+              <a:ext uri="{FF2B5EF4-FFF2-40B4-BE49-F238E27FC236}">
+                <a16:creationId xmlns:a16="http://schemas.microsoft.com/office/drawing/2014/main" id="{C7CB6A8D-96CE-D2BB-1584-BEFB89CA1789}"/>
+              </a:ext>
+            </a:extLst>
+          </p:cNvPr>
+          <p:cNvPicPr>
+            <a:picLocks noChangeAspect="1"/>
+          </p:cNvPicPr>
+          <p:nvPr/>
+        </p:nvPicPr>
+        <p:blipFill>
+          <a:blip r:embed="rId3"/>
+          <a:stretch>
+            <a:fillRect/>
+          </a:stretch>
+        </p:blipFill>
+        <p:spPr>
+          <a:xfrm>
+            <a:off x="702490" y="5613212"/>
+            <a:ext cx="4937943" cy="1085262"/>
+          </a:xfrm>
+          <a:prstGeom prst="rect">
+            <a:avLst/>
+          </a:prstGeom>
+        </p:spPr>
+      </p:pic>
+      <p:pic>
+        <p:nvPicPr>
+          <p:cNvPr id="6" name="Picture 5">
+            <a:extLst>
+              <a:ext uri="{FF2B5EF4-FFF2-40B4-BE49-F238E27FC236}">
+                <a16:creationId xmlns:a16="http://schemas.microsoft.com/office/drawing/2014/main" id="{1AB29775-6908-55E1-3093-1AB871F43E0D}"/>
+              </a:ext>
+            </a:extLst>
+          </p:cNvPr>
+          <p:cNvPicPr>
+            <a:picLocks noChangeAspect="1"/>
+          </p:cNvPicPr>
+          <p:nvPr/>
+        </p:nvPicPr>
+        <p:blipFill>
+          <a:blip r:embed="rId4"/>
+          <a:stretch>
+            <a:fillRect/>
+          </a:stretch>
+        </p:blipFill>
+        <p:spPr>
+          <a:xfrm>
+            <a:off x="5640433" y="3030427"/>
+            <a:ext cx="6118477" cy="2196376"/>
           </a:xfrm>
           <a:prstGeom prst="rect">
             <a:avLst/>
@@ -7549,7 +7680,7 @@
     </p:spTree>
     <p:extLst>
       <p:ext uri="{BB962C8B-B14F-4D97-AF65-F5344CB8AC3E}">
-        <p14:creationId xmlns:p14="http://schemas.microsoft.com/office/powerpoint/2010/main" val="4102690132"/>
+        <p14:creationId xmlns:p14="http://schemas.microsoft.com/office/powerpoint/2010/main" val="2021444348"/>
       </p:ext>
     </p:extLst>
   </p:cSld>
@@ -7559,7 +7690,132 @@
 </p:sld>
 </file>
 
-<file path=ppt/slides/slide5.xml><?xml version="1.0" encoding="utf-8"?>
+<file path=ppt/slides/slide24.xml><?xml version="1.0" encoding="utf-8"?>
+<p:sld xmlns:a="http://schemas.openxmlformats.org/drawingml/2006/main" xmlns:r="http://schemas.openxmlformats.org/officeDocument/2006/relationships" xmlns:p="http://schemas.openxmlformats.org/presentationml/2006/main">
+  <p:cSld>
+    <p:spTree>
+      <p:nvGrpSpPr>
+        <p:cNvPr id="1" name=""/>
+        <p:cNvGrpSpPr/>
+        <p:nvPr/>
+      </p:nvGrpSpPr>
+      <p:grpSpPr>
+        <a:xfrm>
+          <a:off x="0" y="0"/>
+          <a:ext cx="0" cy="0"/>
+          <a:chOff x="0" y="0"/>
+          <a:chExt cx="0" cy="0"/>
+        </a:xfrm>
+      </p:grpSpPr>
+      <p:sp>
+        <p:nvSpPr>
+          <p:cNvPr id="2" name="Title 1">
+            <a:extLst>
+              <a:ext uri="{FF2B5EF4-FFF2-40B4-BE49-F238E27FC236}">
+                <a16:creationId xmlns:a16="http://schemas.microsoft.com/office/drawing/2014/main" id="{E54A98E4-5A93-7B65-61FE-6108707C5D32}"/>
+              </a:ext>
+            </a:extLst>
+          </p:cNvPr>
+          <p:cNvSpPr>
+            <a:spLocks noGrp="1"/>
+          </p:cNvSpPr>
+          <p:nvPr>
+            <p:ph type="title"/>
+          </p:nvPr>
+        </p:nvSpPr>
+        <p:spPr/>
+        <p:txBody>
+          <a:bodyPr/>
+          <a:lstStyle/>
+          <a:p>
+            <a:r>
+              <a:rPr lang="en-US" dirty="0" err="1"/>
+              <a:t>RecordLess</a:t>
+            </a:r>
+            <a:r>
+              <a:rPr lang="en-US" dirty="0"/>
+              <a:t> Outbound REST Messages</a:t>
+            </a:r>
+          </a:p>
+        </p:txBody>
+      </p:sp>
+      <p:sp>
+        <p:nvSpPr>
+          <p:cNvPr id="3" name="Content Placeholder 2">
+            <a:extLst>
+              <a:ext uri="{FF2B5EF4-FFF2-40B4-BE49-F238E27FC236}">
+                <a16:creationId xmlns:a16="http://schemas.microsoft.com/office/drawing/2014/main" id="{2AE0DD66-8421-E197-0063-1DA11A530207}"/>
+              </a:ext>
+            </a:extLst>
+          </p:cNvPr>
+          <p:cNvSpPr>
+            <a:spLocks noGrp="1"/>
+          </p:cNvSpPr>
+          <p:nvPr>
+            <p:ph idx="1"/>
+          </p:nvPr>
+        </p:nvSpPr>
+        <p:spPr>
+          <a:xfrm>
+            <a:off x="581192" y="2180497"/>
+            <a:ext cx="11029615" cy="1013800"/>
+          </a:xfrm>
+        </p:spPr>
+        <p:txBody>
+          <a:bodyPr/>
+          <a:lstStyle/>
+          <a:p>
+            <a:r>
+              <a:rPr lang="en-US" dirty="0"/>
+              <a:t>We can also define a REST message 100% within a script:</a:t>
+            </a:r>
+          </a:p>
+        </p:txBody>
+      </p:sp>
+      <p:pic>
+        <p:nvPicPr>
+          <p:cNvPr id="5" name="Picture 4">
+            <a:extLst>
+              <a:ext uri="{FF2B5EF4-FFF2-40B4-BE49-F238E27FC236}">
+                <a16:creationId xmlns:a16="http://schemas.microsoft.com/office/drawing/2014/main" id="{F731FE68-F24A-F23C-5EF7-3B2C9FEDC98A}"/>
+              </a:ext>
+            </a:extLst>
+          </p:cNvPr>
+          <p:cNvPicPr>
+            <a:picLocks noChangeAspect="1"/>
+          </p:cNvPicPr>
+          <p:nvPr/>
+        </p:nvPicPr>
+        <p:blipFill>
+          <a:blip r:embed="rId2"/>
+          <a:stretch>
+            <a:fillRect/>
+          </a:stretch>
+        </p:blipFill>
+        <p:spPr>
+          <a:xfrm>
+            <a:off x="794596" y="3845451"/>
+            <a:ext cx="10602805" cy="2076740"/>
+          </a:xfrm>
+          <a:prstGeom prst="rect">
+            <a:avLst/>
+          </a:prstGeom>
+        </p:spPr>
+      </p:pic>
+    </p:spTree>
+    <p:extLst>
+      <p:ext uri="{BB962C8B-B14F-4D97-AF65-F5344CB8AC3E}">
+        <p14:creationId xmlns:p14="http://schemas.microsoft.com/office/powerpoint/2010/main" val="4249347348"/>
+      </p:ext>
+    </p:extLst>
+  </p:cSld>
+  <p:clrMapOvr>
+    <a:masterClrMapping/>
+  </p:clrMapOvr>
+</p:sld>
+</file>
+
+<file path=ppt/slides/slide25.xml><?xml version="1.0" encoding="utf-8"?>
 <p:sld xmlns:a="http://schemas.openxmlformats.org/drawingml/2006/main" xmlns:r="http://schemas.openxmlformats.org/officeDocument/2006/relationships" xmlns:p="http://schemas.openxmlformats.org/presentationml/2006/main">
   <p:cSld>
     <p:spTree>
@@ -7567,7 +7823,7 @@
         <p:cNvPr id="1" name="">
           <a:extLst>
             <a:ext uri="{FF2B5EF4-FFF2-40B4-BE49-F238E27FC236}">
-              <a16:creationId xmlns:a16="http://schemas.microsoft.com/office/drawing/2014/main" id="{D9E2DA8A-7A63-BB8C-932A-6C2A931AA6BF}"/>
+              <a16:creationId xmlns:a16="http://schemas.microsoft.com/office/drawing/2014/main" id="{6C1E5454-7174-AE25-60F5-80411370DF8E}"/>
             </a:ext>
           </a:extLst>
         </p:cNvPr>
@@ -7587,7 +7843,7 @@
           <p:cNvPr id="2" name="Title 1">
             <a:extLst>
               <a:ext uri="{FF2B5EF4-FFF2-40B4-BE49-F238E27FC236}">
-                <a16:creationId xmlns:a16="http://schemas.microsoft.com/office/drawing/2014/main" id="{C601DFBC-A3CE-4448-B92B-A375734F8714}"/>
+                <a16:creationId xmlns:a16="http://schemas.microsoft.com/office/drawing/2014/main" id="{C36E8980-04CC-9007-4640-A54075563D91}"/>
               </a:ext>
             </a:extLst>
           </p:cNvPr>
@@ -7615,7 +7871,7 @@
           <p:cNvPr id="3" name="Content Placeholder 2">
             <a:extLst>
               <a:ext uri="{FF2B5EF4-FFF2-40B4-BE49-F238E27FC236}">
-                <a16:creationId xmlns:a16="http://schemas.microsoft.com/office/drawing/2014/main" id="{9BB0070E-AB0E-6BFB-7719-6E5E8B8457E9}"/>
+                <a16:creationId xmlns:a16="http://schemas.microsoft.com/office/drawing/2014/main" id="{D75DB98A-B1E9-43C2-B442-5F87FD5CC771}"/>
               </a:ext>
             </a:extLst>
           </p:cNvPr>
@@ -7628,8 +7884,8 @@
         </p:nvSpPr>
         <p:spPr>
           <a:xfrm>
-            <a:off x="6418730" y="2388699"/>
-            <a:ext cx="5192079" cy="4030762"/>
+            <a:off x="6418730" y="2388698"/>
+            <a:ext cx="5192079" cy="2369914"/>
           </a:xfrm>
         </p:spPr>
         <p:txBody>
@@ -7653,8 +7909,20 @@
                 <a:ea typeface="+mn-lt"/>
                 <a:cs typeface="+mn-lt"/>
               </a:rPr>
-              <a:t>Use the Table API as an aid</a:t>
-            </a:r>
+              <a:t>Create a REST Message that gets a random joke from: </a:t>
+            </a:r>
+            <a:r>
+              <a:rPr lang="en-US" dirty="0">
+                <a:ea typeface="+mn-lt"/>
+                <a:cs typeface="+mn-lt"/>
+                <a:hlinkClick r:id="rId3"/>
+              </a:rPr>
+              <a:t>https://api.chucknorris.io/</a:t>
+            </a:r>
+            <a:endParaRPr lang="en-US" dirty="0">
+              <a:ea typeface="+mn-lt"/>
+              <a:cs typeface="+mn-lt"/>
+            </a:endParaRPr>
           </a:p>
           <a:p>
             <a:pPr marL="305435" indent="-305435"/>
@@ -7663,37 +7931,7 @@
                 <a:ea typeface="+mn-lt"/>
                 <a:cs typeface="+mn-lt"/>
               </a:rPr>
-              <a:t>What endpoint should I hit to create an incident record? What does your request body look like?</a:t>
-            </a:r>
-          </a:p>
-          <a:p>
-            <a:pPr marL="305435" indent="-305435"/>
-            <a:r>
-              <a:rPr lang="en-US" dirty="0">
-                <a:ea typeface="+mn-lt"/>
-                <a:cs typeface="+mn-lt"/>
-              </a:rPr>
-              <a:t>We should be able to set the impact, urgency, and short description. </a:t>
-            </a:r>
-          </a:p>
-          <a:p>
-            <a:pPr marL="305435" indent="-305435"/>
-            <a:r>
-              <a:rPr lang="en-US" dirty="0">
-                <a:ea typeface="+mn-lt"/>
-                <a:cs typeface="+mn-lt"/>
-              </a:rPr>
-              <a:t>After the record is created, we should get a 201 status code returned</a:t>
-            </a:r>
-          </a:p>
-          <a:p>
-            <a:pPr marL="305435" indent="-305435"/>
-            <a:r>
-              <a:rPr lang="en-US" dirty="0">
-                <a:ea typeface="+mn-lt"/>
-                <a:cs typeface="+mn-lt"/>
-              </a:rPr>
-              <a:t>The incident number should be returned to the client after it is created</a:t>
+              <a:t>Call the REST Message and print the results to your system logs via a background script</a:t>
             </a:r>
           </a:p>
         </p:txBody>
@@ -7703,7 +7941,7 @@
           <p:cNvPr id="4" name="Content Placeholder 2">
             <a:extLst>
               <a:ext uri="{FF2B5EF4-FFF2-40B4-BE49-F238E27FC236}">
-                <a16:creationId xmlns:a16="http://schemas.microsoft.com/office/drawing/2014/main" id="{A8ED4966-87FF-02A8-4B97-D5786944BB9E}"/>
+                <a16:creationId xmlns:a16="http://schemas.microsoft.com/office/drawing/2014/main" id="{C1CD0968-2ED9-2D9F-D373-184CC07A9751}"/>
               </a:ext>
             </a:extLst>
           </p:cNvPr>
@@ -7942,6 +8180,715 @@
                 <a:ea typeface="+mn-lt"/>
                 <a:cs typeface="+mn-lt"/>
               </a:rPr>
+              <a:t>Create an Outbound REST Message</a:t>
+            </a:r>
+          </a:p>
+        </p:txBody>
+      </p:sp>
+    </p:spTree>
+    <p:extLst>
+      <p:ext uri="{BB962C8B-B14F-4D97-AF65-F5344CB8AC3E}">
+        <p14:creationId xmlns:p14="http://schemas.microsoft.com/office/powerpoint/2010/main" val="512930782"/>
+      </p:ext>
+    </p:extLst>
+  </p:cSld>
+  <p:clrMapOvr>
+    <a:masterClrMapping/>
+  </p:clrMapOvr>
+</p:sld>
+</file>
+
+<file path=ppt/slides/slide3.xml><?xml version="1.0" encoding="utf-8"?>
+<p:sld xmlns:a="http://schemas.openxmlformats.org/drawingml/2006/main" xmlns:r="http://schemas.openxmlformats.org/officeDocument/2006/relationships" xmlns:p="http://schemas.openxmlformats.org/presentationml/2006/main">
+  <p:cSld>
+    <p:spTree>
+      <p:nvGrpSpPr>
+        <p:cNvPr id="1" name=""/>
+        <p:cNvGrpSpPr/>
+        <p:nvPr/>
+      </p:nvGrpSpPr>
+      <p:grpSpPr>
+        <a:xfrm>
+          <a:off x="0" y="0"/>
+          <a:ext cx="0" cy="0"/>
+          <a:chOff x="0" y="0"/>
+          <a:chExt cx="0" cy="0"/>
+        </a:xfrm>
+      </p:grpSpPr>
+      <p:sp>
+        <p:nvSpPr>
+          <p:cNvPr id="2" name="Title 1">
+            <a:extLst>
+              <a:ext uri="{FF2B5EF4-FFF2-40B4-BE49-F238E27FC236}">
+                <a16:creationId xmlns:a16="http://schemas.microsoft.com/office/drawing/2014/main" id="{82DCA843-AABC-E7C6-10E8-2FA45334482E}"/>
+              </a:ext>
+            </a:extLst>
+          </p:cNvPr>
+          <p:cNvSpPr>
+            <a:spLocks noGrp="1"/>
+          </p:cNvSpPr>
+          <p:nvPr>
+            <p:ph type="title"/>
+          </p:nvPr>
+        </p:nvSpPr>
+        <p:spPr/>
+        <p:txBody>
+          <a:bodyPr/>
+          <a:lstStyle/>
+          <a:p>
+            <a:r>
+              <a:rPr lang="en-US" dirty="0"/>
+              <a:t>Inbound Options</a:t>
+            </a:r>
+          </a:p>
+        </p:txBody>
+      </p:sp>
+      <p:sp>
+        <p:nvSpPr>
+          <p:cNvPr id="3" name="Content Placeholder 2">
+            <a:extLst>
+              <a:ext uri="{FF2B5EF4-FFF2-40B4-BE49-F238E27FC236}">
+                <a16:creationId xmlns:a16="http://schemas.microsoft.com/office/drawing/2014/main" id="{107FBFBF-6605-B2E4-F7A7-CD5E5ED580DB}"/>
+              </a:ext>
+            </a:extLst>
+          </p:cNvPr>
+          <p:cNvSpPr>
+            <a:spLocks noGrp="1"/>
+          </p:cNvSpPr>
+          <p:nvPr>
+            <p:ph idx="1"/>
+          </p:nvPr>
+        </p:nvSpPr>
+        <p:spPr>
+          <a:xfrm>
+            <a:off x="581191" y="1995439"/>
+            <a:ext cx="11029615" cy="4481561"/>
+          </a:xfrm>
+        </p:spPr>
+        <p:txBody>
+          <a:bodyPr>
+            <a:normAutofit lnSpcReduction="10000"/>
+          </a:bodyPr>
+          <a:lstStyle/>
+          <a:p>
+            <a:r>
+              <a:rPr lang="en-US" dirty="0"/>
+              <a:t>REST APIs</a:t>
+            </a:r>
+          </a:p>
+          <a:p>
+            <a:pPr lvl="1"/>
+            <a:r>
+              <a:rPr lang="en-US" dirty="0"/>
+              <a:t>REST API Explorer – discover and test ServiceNow’s REST APIs</a:t>
+            </a:r>
+          </a:p>
+          <a:p>
+            <a:pPr lvl="1"/>
+            <a:r>
+              <a:rPr lang="en-US" dirty="0"/>
+              <a:t>Scripted REST APIs – build your own endpoints with custom logic </a:t>
+            </a:r>
+          </a:p>
+          <a:p>
+            <a:r>
+              <a:rPr lang="en-US" dirty="0"/>
+              <a:t>SOAP APIs</a:t>
+            </a:r>
+          </a:p>
+          <a:p>
+            <a:pPr lvl="1"/>
+            <a:r>
+              <a:rPr lang="en-US" dirty="0"/>
+              <a:t> Scripted SOAP APIs – build your own SOAP endpoints with custom logic</a:t>
+            </a:r>
+          </a:p>
+          <a:p>
+            <a:r>
+              <a:rPr lang="en-US" dirty="0"/>
+              <a:t>Import Sets – batch or schedule data imports into ServiceNow tables (REST – </a:t>
+            </a:r>
+            <a:r>
+              <a:rPr lang="en-US" dirty="0" err="1"/>
+              <a:t>IntegrationHub</a:t>
+            </a:r>
+            <a:r>
+              <a:rPr lang="en-US" dirty="0"/>
+              <a:t> option available)</a:t>
+            </a:r>
+          </a:p>
+          <a:p>
+            <a:r>
+              <a:rPr lang="en-US" dirty="0"/>
+              <a:t>Email Inbound Actions – use scripts to interpret received email and then create or update records </a:t>
+            </a:r>
+          </a:p>
+          <a:p>
+            <a:r>
+              <a:rPr lang="en-US" dirty="0" err="1"/>
+              <a:t>IntegrationHub</a:t>
+            </a:r>
+            <a:r>
+              <a:rPr lang="en-US" dirty="0"/>
+              <a:t> (Flow Designer) – use REST triggers to launch a flow from a REST request</a:t>
+            </a:r>
+          </a:p>
+          <a:p>
+            <a:r>
+              <a:rPr lang="en-US" dirty="0" err="1"/>
+              <a:t>IntegrationHub</a:t>
+            </a:r>
+            <a:r>
+              <a:rPr lang="en-US" dirty="0"/>
+              <a:t> (Import Tool) – schedule batched record imports from files or external systems</a:t>
+            </a:r>
+          </a:p>
+          <a:p>
+            <a:r>
+              <a:rPr lang="en-US" dirty="0"/>
+              <a:t>MID Server – bridge ServiceNow and on-premises systems</a:t>
+            </a:r>
+          </a:p>
+          <a:p>
+            <a:r>
+              <a:rPr lang="en-US" dirty="0"/>
+              <a:t>Application Registry – these records define our authentication scheme for OAuth 2.0 </a:t>
+            </a:r>
+          </a:p>
+          <a:p>
+            <a:pPr lvl="1"/>
+            <a:r>
+              <a:rPr lang="en-US" dirty="0"/>
+              <a:t>Any external system will need to pass through our Application Registry to get an authorization token and an access token</a:t>
+            </a:r>
+          </a:p>
+        </p:txBody>
+      </p:sp>
+    </p:spTree>
+    <p:extLst>
+      <p:ext uri="{BB962C8B-B14F-4D97-AF65-F5344CB8AC3E}">
+        <p14:creationId xmlns:p14="http://schemas.microsoft.com/office/powerpoint/2010/main" val="742969173"/>
+      </p:ext>
+    </p:extLst>
+  </p:cSld>
+  <p:clrMapOvr>
+    <a:masterClrMapping/>
+  </p:clrMapOvr>
+</p:sld>
+</file>
+
+<file path=ppt/slides/slide4.xml><?xml version="1.0" encoding="utf-8"?>
+<p:sld xmlns:a="http://schemas.openxmlformats.org/drawingml/2006/main" xmlns:r="http://schemas.openxmlformats.org/officeDocument/2006/relationships" xmlns:p="http://schemas.openxmlformats.org/presentationml/2006/main">
+  <p:cSld>
+    <p:spTree>
+      <p:nvGrpSpPr>
+        <p:cNvPr id="1" name=""/>
+        <p:cNvGrpSpPr/>
+        <p:nvPr/>
+      </p:nvGrpSpPr>
+      <p:grpSpPr>
+        <a:xfrm>
+          <a:off x="0" y="0"/>
+          <a:ext cx="0" cy="0"/>
+          <a:chOff x="0" y="0"/>
+          <a:chExt cx="0" cy="0"/>
+        </a:xfrm>
+      </p:grpSpPr>
+      <p:sp>
+        <p:nvSpPr>
+          <p:cNvPr id="2" name="Title 1">
+            <a:extLst>
+              <a:ext uri="{FF2B5EF4-FFF2-40B4-BE49-F238E27FC236}">
+                <a16:creationId xmlns:a16="http://schemas.microsoft.com/office/drawing/2014/main" id="{ACA295F1-E4E6-083B-7D0E-927228812788}"/>
+              </a:ext>
+            </a:extLst>
+          </p:cNvPr>
+          <p:cNvSpPr>
+            <a:spLocks noGrp="1"/>
+          </p:cNvSpPr>
+          <p:nvPr>
+            <p:ph type="title"/>
+          </p:nvPr>
+        </p:nvSpPr>
+        <p:spPr/>
+        <p:txBody>
+          <a:bodyPr/>
+          <a:lstStyle/>
+          <a:p>
+            <a:r>
+              <a:rPr lang="en-US" dirty="0"/>
+              <a:t>REST API Explorer</a:t>
+            </a:r>
+          </a:p>
+        </p:txBody>
+      </p:sp>
+      <p:sp>
+        <p:nvSpPr>
+          <p:cNvPr id="3" name="Content Placeholder 2">
+            <a:extLst>
+              <a:ext uri="{FF2B5EF4-FFF2-40B4-BE49-F238E27FC236}">
+                <a16:creationId xmlns:a16="http://schemas.microsoft.com/office/drawing/2014/main" id="{E11F083F-F75B-F5B3-B8EC-6D960AA50EEB}"/>
+              </a:ext>
+            </a:extLst>
+          </p:cNvPr>
+          <p:cNvSpPr>
+            <a:spLocks noGrp="1"/>
+          </p:cNvSpPr>
+          <p:nvPr>
+            <p:ph idx="1"/>
+          </p:nvPr>
+        </p:nvSpPr>
+        <p:spPr>
+          <a:xfrm>
+            <a:off x="2669124" y="1982560"/>
+            <a:ext cx="6853750" cy="796652"/>
+          </a:xfrm>
+        </p:spPr>
+        <p:txBody>
+          <a:bodyPr>
+            <a:normAutofit/>
+          </a:bodyPr>
+          <a:lstStyle/>
+          <a:p>
+            <a:r>
+              <a:rPr lang="en-US" dirty="0"/>
+              <a:t>Use the REST API Explorer to test REST endpoints on your instance</a:t>
+            </a:r>
+          </a:p>
+          <a:p>
+            <a:r>
+              <a:rPr lang="en-US" dirty="0"/>
+              <a:t>Offers guidance on how to construct requests</a:t>
+            </a:r>
+          </a:p>
+        </p:txBody>
+      </p:sp>
+      <p:pic>
+        <p:nvPicPr>
+          <p:cNvPr id="5" name="Picture 4">
+            <a:extLst>
+              <a:ext uri="{FF2B5EF4-FFF2-40B4-BE49-F238E27FC236}">
+                <a16:creationId xmlns:a16="http://schemas.microsoft.com/office/drawing/2014/main" id="{B0B879BD-A38A-FD87-0C93-BF42548DE5AB}"/>
+              </a:ext>
+            </a:extLst>
+          </p:cNvPr>
+          <p:cNvPicPr>
+            <a:picLocks noChangeAspect="1"/>
+          </p:cNvPicPr>
+          <p:nvPr/>
+        </p:nvPicPr>
+        <p:blipFill>
+          <a:blip r:embed="rId2"/>
+          <a:stretch>
+            <a:fillRect/>
+          </a:stretch>
+        </p:blipFill>
+        <p:spPr>
+          <a:xfrm>
+            <a:off x="925916" y="2855412"/>
+            <a:ext cx="10340167" cy="3765998"/>
+          </a:xfrm>
+          <a:prstGeom prst="rect">
+            <a:avLst/>
+          </a:prstGeom>
+        </p:spPr>
+      </p:pic>
+    </p:spTree>
+    <p:extLst>
+      <p:ext uri="{BB962C8B-B14F-4D97-AF65-F5344CB8AC3E}">
+        <p14:creationId xmlns:p14="http://schemas.microsoft.com/office/powerpoint/2010/main" val="4102690132"/>
+      </p:ext>
+    </p:extLst>
+  </p:cSld>
+  <p:clrMapOvr>
+    <a:masterClrMapping/>
+  </p:clrMapOvr>
+</p:sld>
+</file>
+
+<file path=ppt/slides/slide5.xml><?xml version="1.0" encoding="utf-8"?>
+<p:sld xmlns:a="http://schemas.openxmlformats.org/drawingml/2006/main" xmlns:r="http://schemas.openxmlformats.org/officeDocument/2006/relationships" xmlns:p="http://schemas.openxmlformats.org/presentationml/2006/main">
+  <p:cSld>
+    <p:spTree>
+      <p:nvGrpSpPr>
+        <p:cNvPr id="1" name="">
+          <a:extLst>
+            <a:ext uri="{FF2B5EF4-FFF2-40B4-BE49-F238E27FC236}">
+              <a16:creationId xmlns:a16="http://schemas.microsoft.com/office/drawing/2014/main" id="{D9E2DA8A-7A63-BB8C-932A-6C2A931AA6BF}"/>
+            </a:ext>
+          </a:extLst>
+        </p:cNvPr>
+        <p:cNvGrpSpPr/>
+        <p:nvPr/>
+      </p:nvGrpSpPr>
+      <p:grpSpPr>
+        <a:xfrm>
+          <a:off x="0" y="0"/>
+          <a:ext cx="0" cy="0"/>
+          <a:chOff x="0" y="0"/>
+          <a:chExt cx="0" cy="0"/>
+        </a:xfrm>
+      </p:grpSpPr>
+      <p:sp>
+        <p:nvSpPr>
+          <p:cNvPr id="2" name="Title 1">
+            <a:extLst>
+              <a:ext uri="{FF2B5EF4-FFF2-40B4-BE49-F238E27FC236}">
+                <a16:creationId xmlns:a16="http://schemas.microsoft.com/office/drawing/2014/main" id="{C601DFBC-A3CE-4448-B92B-A375734F8714}"/>
+              </a:ext>
+            </a:extLst>
+          </p:cNvPr>
+          <p:cNvSpPr>
+            <a:spLocks noGrp="1"/>
+          </p:cNvSpPr>
+          <p:nvPr>
+            <p:ph type="title"/>
+          </p:nvPr>
+        </p:nvSpPr>
+        <p:spPr/>
+        <p:txBody>
+          <a:bodyPr/>
+          <a:lstStyle/>
+          <a:p>
+            <a:r>
+              <a:rPr lang="en-US" dirty="0"/>
+              <a:t>Challenge</a:t>
+            </a:r>
+          </a:p>
+        </p:txBody>
+      </p:sp>
+      <p:sp>
+        <p:nvSpPr>
+          <p:cNvPr id="3" name="Content Placeholder 2">
+            <a:extLst>
+              <a:ext uri="{FF2B5EF4-FFF2-40B4-BE49-F238E27FC236}">
+                <a16:creationId xmlns:a16="http://schemas.microsoft.com/office/drawing/2014/main" id="{9BB0070E-AB0E-6BFB-7719-6E5E8B8457E9}"/>
+              </a:ext>
+            </a:extLst>
+          </p:cNvPr>
+          <p:cNvSpPr>
+            <a:spLocks noGrp="1"/>
+          </p:cNvSpPr>
+          <p:nvPr>
+            <p:ph idx="1"/>
+          </p:nvPr>
+        </p:nvSpPr>
+        <p:spPr>
+          <a:xfrm>
+            <a:off x="6418730" y="2388699"/>
+            <a:ext cx="5192079" cy="4030762"/>
+          </a:xfrm>
+        </p:spPr>
+        <p:txBody>
+          <a:bodyPr>
+            <a:normAutofit/>
+          </a:bodyPr>
+          <a:lstStyle/>
+          <a:p>
+            <a:pPr marL="0" indent="0">
+              <a:buNone/>
+            </a:pPr>
+            <a:r>
+              <a:rPr lang="en-US" b="1" dirty="0"/>
+              <a:t>Scenario: </a:t>
+            </a:r>
+          </a:p>
+          <a:p>
+            <a:pPr marL="305435" indent="-305435"/>
+            <a:r>
+              <a:rPr lang="en-US" dirty="0">
+                <a:ea typeface="+mn-lt"/>
+                <a:cs typeface="+mn-lt"/>
+              </a:rPr>
+              <a:t>Use the Table API as an aid</a:t>
+            </a:r>
+          </a:p>
+          <a:p>
+            <a:pPr marL="305435" indent="-305435"/>
+            <a:r>
+              <a:rPr lang="en-US" dirty="0">
+                <a:ea typeface="+mn-lt"/>
+                <a:cs typeface="+mn-lt"/>
+              </a:rPr>
+              <a:t>What endpoint should I hit to create an incident record? What does your request body look like?</a:t>
+            </a:r>
+          </a:p>
+          <a:p>
+            <a:pPr marL="305435" indent="-305435"/>
+            <a:r>
+              <a:rPr lang="en-US" dirty="0">
+                <a:ea typeface="+mn-lt"/>
+                <a:cs typeface="+mn-lt"/>
+              </a:rPr>
+              <a:t>We should be able to set the impact, urgency, and short description. </a:t>
+            </a:r>
+          </a:p>
+          <a:p>
+            <a:pPr marL="305435" indent="-305435"/>
+            <a:r>
+              <a:rPr lang="en-US" dirty="0">
+                <a:ea typeface="+mn-lt"/>
+                <a:cs typeface="+mn-lt"/>
+              </a:rPr>
+              <a:t>After the record is created, we should get a 201 status code returned</a:t>
+            </a:r>
+          </a:p>
+          <a:p>
+            <a:pPr marL="305435" indent="-305435"/>
+            <a:r>
+              <a:rPr lang="en-US" dirty="0">
+                <a:ea typeface="+mn-lt"/>
+                <a:cs typeface="+mn-lt"/>
+              </a:rPr>
+              <a:t>The incident number should be returned to the client after it is created</a:t>
+            </a:r>
+          </a:p>
+        </p:txBody>
+      </p:sp>
+      <p:sp>
+        <p:nvSpPr>
+          <p:cNvPr id="4" name="Content Placeholder 2">
+            <a:extLst>
+              <a:ext uri="{FF2B5EF4-FFF2-40B4-BE49-F238E27FC236}">
+                <a16:creationId xmlns:a16="http://schemas.microsoft.com/office/drawing/2014/main" id="{A8ED4966-87FF-02A8-4B97-D5786944BB9E}"/>
+              </a:ext>
+            </a:extLst>
+          </p:cNvPr>
+          <p:cNvSpPr txBox="1">
+            <a:spLocks/>
+          </p:cNvSpPr>
+          <p:nvPr/>
+        </p:nvSpPr>
+        <p:spPr>
+          <a:xfrm>
+            <a:off x="903921" y="2262799"/>
+            <a:ext cx="4869350" cy="1484448"/>
+          </a:xfrm>
+          <a:prstGeom prst="rect">
+            <a:avLst/>
+          </a:prstGeom>
+        </p:spPr>
+        <p:txBody>
+          <a:bodyPr vert="horz" lIns="91440" tIns="45720" rIns="91440" bIns="45720" rtlCol="0" anchor="ctr">
+            <a:normAutofit/>
+          </a:bodyPr>
+          <a:lstStyle>
+            <a:lvl1pPr marL="306000" indent="-306000" algn="l" defTabSz="457200" rtl="0" eaLnBrk="1" latinLnBrk="0" hangingPunct="1">
+              <a:spcBef>
+                <a:spcPct val="20000"/>
+              </a:spcBef>
+              <a:spcAft>
+                <a:spcPts val="600"/>
+              </a:spcAft>
+              <a:buClr>
+                <a:schemeClr val="accent2"/>
+              </a:buClr>
+              <a:buSzPct val="92000"/>
+              <a:buFont typeface="Wingdings 2" panose="05020102010507070707" pitchFamily="18" charset="2"/>
+              <a:buChar char=""/>
+              <a:defRPr sz="1800" kern="1200">
+                <a:solidFill>
+                  <a:schemeClr val="tx2"/>
+                </a:solidFill>
+                <a:latin typeface="+mn-lt"/>
+                <a:ea typeface="+mn-ea"/>
+                <a:cs typeface="+mn-cs"/>
+              </a:defRPr>
+            </a:lvl1pPr>
+            <a:lvl2pPr marL="630000" indent="-306000" algn="l" defTabSz="457200" rtl="0" eaLnBrk="1" latinLnBrk="0" hangingPunct="1">
+              <a:spcBef>
+                <a:spcPct val="20000"/>
+              </a:spcBef>
+              <a:spcAft>
+                <a:spcPts val="600"/>
+              </a:spcAft>
+              <a:buClr>
+                <a:schemeClr val="accent2"/>
+              </a:buClr>
+              <a:buSzPct val="92000"/>
+              <a:buFont typeface="Wingdings 2" panose="05020102010507070707" pitchFamily="18" charset="2"/>
+              <a:buChar char=""/>
+              <a:defRPr sz="1600" kern="1200">
+                <a:solidFill>
+                  <a:schemeClr val="tx2"/>
+                </a:solidFill>
+                <a:latin typeface="+mn-lt"/>
+                <a:ea typeface="+mn-ea"/>
+                <a:cs typeface="+mn-cs"/>
+              </a:defRPr>
+            </a:lvl2pPr>
+            <a:lvl3pPr marL="900000" indent="-270000" algn="l" defTabSz="457200" rtl="0" eaLnBrk="1" latinLnBrk="0" hangingPunct="1">
+              <a:spcBef>
+                <a:spcPct val="20000"/>
+              </a:spcBef>
+              <a:spcAft>
+                <a:spcPts val="600"/>
+              </a:spcAft>
+              <a:buClr>
+                <a:schemeClr val="accent2"/>
+              </a:buClr>
+              <a:buSzPct val="92000"/>
+              <a:buFont typeface="Wingdings 2" panose="05020102010507070707" pitchFamily="18" charset="2"/>
+              <a:buChar char=""/>
+              <a:defRPr sz="1400" kern="1200">
+                <a:solidFill>
+                  <a:schemeClr val="tx2"/>
+                </a:solidFill>
+                <a:latin typeface="+mn-lt"/>
+                <a:ea typeface="+mn-ea"/>
+                <a:cs typeface="+mn-cs"/>
+              </a:defRPr>
+            </a:lvl3pPr>
+            <a:lvl4pPr marL="1242000" indent="-234000" algn="l" defTabSz="457200" rtl="0" eaLnBrk="1" latinLnBrk="0" hangingPunct="1">
+              <a:spcBef>
+                <a:spcPct val="20000"/>
+              </a:spcBef>
+              <a:spcAft>
+                <a:spcPts val="600"/>
+              </a:spcAft>
+              <a:buClr>
+                <a:schemeClr val="accent2"/>
+              </a:buClr>
+              <a:buSzPct val="92000"/>
+              <a:buFont typeface="Wingdings 2" panose="05020102010507070707" pitchFamily="18" charset="2"/>
+              <a:buChar char=""/>
+              <a:defRPr sz="1200" kern="1200">
+                <a:solidFill>
+                  <a:schemeClr val="tx2"/>
+                </a:solidFill>
+                <a:latin typeface="+mn-lt"/>
+                <a:ea typeface="+mn-ea"/>
+                <a:cs typeface="+mn-cs"/>
+              </a:defRPr>
+            </a:lvl4pPr>
+            <a:lvl5pPr marL="1602000" indent="-234000" algn="l" defTabSz="457200" rtl="0" eaLnBrk="1" latinLnBrk="0" hangingPunct="1">
+              <a:spcBef>
+                <a:spcPct val="20000"/>
+              </a:spcBef>
+              <a:spcAft>
+                <a:spcPts val="600"/>
+              </a:spcAft>
+              <a:buClr>
+                <a:schemeClr val="accent2"/>
+              </a:buClr>
+              <a:buSzPct val="92000"/>
+              <a:buFont typeface="Wingdings 2" panose="05020102010507070707" pitchFamily="18" charset="2"/>
+              <a:buChar char=""/>
+              <a:defRPr sz="1200" kern="1200">
+                <a:solidFill>
+                  <a:schemeClr val="tx2"/>
+                </a:solidFill>
+                <a:latin typeface="+mn-lt"/>
+                <a:ea typeface="+mn-ea"/>
+                <a:cs typeface="+mn-cs"/>
+              </a:defRPr>
+            </a:lvl5pPr>
+            <a:lvl6pPr marL="1900000" indent="-228600" algn="l" defTabSz="457200" rtl="0" eaLnBrk="1" latinLnBrk="0" hangingPunct="1">
+              <a:spcBef>
+                <a:spcPct val="20000"/>
+              </a:spcBef>
+              <a:spcAft>
+                <a:spcPts val="600"/>
+              </a:spcAft>
+              <a:buClr>
+                <a:schemeClr val="accent2"/>
+              </a:buClr>
+              <a:buSzPct val="92000"/>
+              <a:buFont typeface="Wingdings 2" panose="05020102010507070707" pitchFamily="18" charset="2"/>
+              <a:buChar char=""/>
+              <a:defRPr sz="1200" kern="1200">
+                <a:solidFill>
+                  <a:schemeClr val="tx2"/>
+                </a:solidFill>
+                <a:latin typeface="+mn-lt"/>
+                <a:ea typeface="+mn-ea"/>
+                <a:cs typeface="+mn-cs"/>
+              </a:defRPr>
+            </a:lvl6pPr>
+            <a:lvl7pPr marL="2200000" indent="-228600" algn="l" defTabSz="457200" rtl="0" eaLnBrk="1" latinLnBrk="0" hangingPunct="1">
+              <a:spcBef>
+                <a:spcPct val="20000"/>
+              </a:spcBef>
+              <a:spcAft>
+                <a:spcPts val="600"/>
+              </a:spcAft>
+              <a:buClr>
+                <a:schemeClr val="accent2"/>
+              </a:buClr>
+              <a:buSzPct val="92000"/>
+              <a:buFont typeface="Wingdings 2" panose="05020102010507070707" pitchFamily="18" charset="2"/>
+              <a:buChar char=""/>
+              <a:defRPr sz="1200" kern="1200">
+                <a:solidFill>
+                  <a:schemeClr val="tx2"/>
+                </a:solidFill>
+                <a:latin typeface="+mn-lt"/>
+                <a:ea typeface="+mn-ea"/>
+                <a:cs typeface="+mn-cs"/>
+              </a:defRPr>
+            </a:lvl7pPr>
+            <a:lvl8pPr marL="2500000" indent="-228600" algn="l" defTabSz="457200" rtl="0" eaLnBrk="1" latinLnBrk="0" hangingPunct="1">
+              <a:spcBef>
+                <a:spcPct val="20000"/>
+              </a:spcBef>
+              <a:spcAft>
+                <a:spcPts val="600"/>
+              </a:spcAft>
+              <a:buClr>
+                <a:schemeClr val="accent2"/>
+              </a:buClr>
+              <a:buSzPct val="92000"/>
+              <a:buFont typeface="Wingdings 2" panose="05020102010507070707" pitchFamily="18" charset="2"/>
+              <a:buChar char=""/>
+              <a:defRPr sz="1200" kern="1200">
+                <a:solidFill>
+                  <a:schemeClr val="tx2"/>
+                </a:solidFill>
+                <a:latin typeface="+mn-lt"/>
+                <a:ea typeface="+mn-ea"/>
+                <a:cs typeface="+mn-cs"/>
+              </a:defRPr>
+            </a:lvl8pPr>
+            <a:lvl9pPr marL="2800000" indent="-228600" algn="l" defTabSz="457200" rtl="0" eaLnBrk="1" latinLnBrk="0" hangingPunct="1">
+              <a:spcBef>
+                <a:spcPct val="20000"/>
+              </a:spcBef>
+              <a:spcAft>
+                <a:spcPts val="600"/>
+              </a:spcAft>
+              <a:buClr>
+                <a:schemeClr val="accent2"/>
+              </a:buClr>
+              <a:buSzPct val="92000"/>
+              <a:buFont typeface="Wingdings 2" panose="05020102010507070707" pitchFamily="18" charset="2"/>
+              <a:buChar char=""/>
+              <a:defRPr sz="1200" kern="1200">
+                <a:solidFill>
+                  <a:schemeClr val="tx2"/>
+                </a:solidFill>
+                <a:latin typeface="+mn-lt"/>
+                <a:ea typeface="+mn-ea"/>
+                <a:cs typeface="+mn-cs"/>
+              </a:defRPr>
+            </a:lvl9pPr>
+          </a:lstStyle>
+          <a:p>
+            <a:pPr marL="0" indent="0">
+              <a:buFont typeface="Wingdings 2" panose="05020102010507070707" pitchFamily="18" charset="2"/>
+              <a:buNone/>
+            </a:pPr>
+            <a:r>
+              <a:rPr lang="en-US" b="1" dirty="0"/>
+              <a:t>Goal: </a:t>
+            </a:r>
+          </a:p>
+          <a:p>
+            <a:pPr marL="305435" indent="-305435"/>
+            <a:r>
+              <a:rPr lang="en-US" dirty="0">
+                <a:ea typeface="+mn-lt"/>
+                <a:cs typeface="+mn-lt"/>
+              </a:rPr>
               <a:t>Find an endpoint to use</a:t>
             </a:r>
           </a:p>
@@ -8207,7 +9154,7 @@
         <p:spPr>
           <a:xfrm>
             <a:off x="581192" y="2263763"/>
-            <a:ext cx="3760237" cy="1754326"/>
+            <a:ext cx="3760237" cy="2031325"/>
           </a:xfrm>
           <a:prstGeom prst="rect">
             <a:avLst/>
@@ -8255,7 +9202,7 @@
             </a:pPr>
             <a:r>
               <a:rPr lang="en-US" dirty="0"/>
-              <a:t>The generated WSDL file is shared to consumers</a:t>
+              <a:t>The generated WSDL file is shared to consumers (click on the link and download file as xml)</a:t>
             </a:r>
           </a:p>
         </p:txBody>
@@ -8376,7 +9323,7 @@
           <a:p>
             <a:r>
               <a:rPr lang="en-US" dirty="0"/>
-              <a:t>We can use SOAP UI to test our service</a:t>
+              <a:t>We can use SOAP UI to test our service – just bring your WSDL file!</a:t>
             </a:r>
           </a:p>
           <a:p>

--- a/Week_7/Integrations.pptx
+++ b/Week_7/Integrations.pptx
@@ -5,7 +5,7 @@
     <p:sldMasterId id="2147483684" r:id="rId1"/>
   </p:sldMasterIdLst>
   <p:notesMasterIdLst>
-    <p:notesMasterId r:id="rId27"/>
+    <p:notesMasterId r:id="rId29"/>
   </p:notesMasterIdLst>
   <p:sldIdLst>
     <p:sldId id="380" r:id="rId2"/>
@@ -33,6 +33,8 @@
     <p:sldId id="441" r:id="rId24"/>
     <p:sldId id="442" r:id="rId25"/>
     <p:sldId id="443" r:id="rId26"/>
+    <p:sldId id="444" r:id="rId27"/>
+    <p:sldId id="445" r:id="rId28"/>
   </p:sldIdLst>
   <p:sldSz cx="12192000" cy="6858000"/>
   <p:notesSz cx="6858000" cy="9144000"/>
@@ -821,6 +823,117 @@
     <p:extLst>
       <p:ext uri="{BB962C8B-B14F-4D97-AF65-F5344CB8AC3E}">
         <p14:creationId xmlns:p14="http://schemas.microsoft.com/office/powerpoint/2010/main" val="3672188369"/>
+      </p:ext>
+    </p:extLst>
+  </p:cSld>
+  <p:clrMapOvr>
+    <a:masterClrMapping/>
+  </p:clrMapOvr>
+</p:notes>
+</file>
+
+<file path=ppt/notesSlides/notesSlide4.xml><?xml version="1.0" encoding="utf-8"?>
+<p:notes xmlns:a="http://schemas.openxmlformats.org/drawingml/2006/main" xmlns:r="http://schemas.openxmlformats.org/officeDocument/2006/relationships" xmlns:p="http://schemas.openxmlformats.org/presentationml/2006/main">
+  <p:cSld>
+    <p:spTree>
+      <p:nvGrpSpPr>
+        <p:cNvPr id="1" name="">
+          <a:extLst>
+            <a:ext uri="{FF2B5EF4-FFF2-40B4-BE49-F238E27FC236}">
+              <a16:creationId xmlns:a16="http://schemas.microsoft.com/office/drawing/2014/main" id="{90CD9E6F-DC37-C5E9-FBD0-F9865468C998}"/>
+            </a:ext>
+          </a:extLst>
+        </p:cNvPr>
+        <p:cNvGrpSpPr/>
+        <p:nvPr/>
+      </p:nvGrpSpPr>
+      <p:grpSpPr>
+        <a:xfrm>
+          <a:off x="0" y="0"/>
+          <a:ext cx="0" cy="0"/>
+          <a:chOff x="0" y="0"/>
+          <a:chExt cx="0" cy="0"/>
+        </a:xfrm>
+      </p:grpSpPr>
+      <p:sp>
+        <p:nvSpPr>
+          <p:cNvPr id="2" name="Slide Image Placeholder 1">
+            <a:extLst>
+              <a:ext uri="{FF2B5EF4-FFF2-40B4-BE49-F238E27FC236}">
+                <a16:creationId xmlns:a16="http://schemas.microsoft.com/office/drawing/2014/main" id="{8CCB2F0F-7D59-6F0D-AD38-79EFD5061000}"/>
+              </a:ext>
+            </a:extLst>
+          </p:cNvPr>
+          <p:cNvSpPr>
+            <a:spLocks noGrp="1" noRot="1" noChangeAspect="1"/>
+          </p:cNvSpPr>
+          <p:nvPr>
+            <p:ph type="sldImg"/>
+          </p:nvPr>
+        </p:nvSpPr>
+        <p:spPr/>
+      </p:sp>
+      <p:sp>
+        <p:nvSpPr>
+          <p:cNvPr id="3" name="Notes Placeholder 2">
+            <a:extLst>
+              <a:ext uri="{FF2B5EF4-FFF2-40B4-BE49-F238E27FC236}">
+                <a16:creationId xmlns:a16="http://schemas.microsoft.com/office/drawing/2014/main" id="{BBD7DD95-E9D5-9754-785C-402108797AC7}"/>
+              </a:ext>
+            </a:extLst>
+          </p:cNvPr>
+          <p:cNvSpPr>
+            <a:spLocks noGrp="1"/>
+          </p:cNvSpPr>
+          <p:nvPr>
+            <p:ph type="body" idx="1"/>
+          </p:nvPr>
+        </p:nvSpPr>
+        <p:spPr/>
+        <p:txBody>
+          <a:bodyPr/>
+          <a:lstStyle/>
+          <a:p>
+            <a:r>
+              <a:rPr lang="en-US" dirty="0"/>
+              <a:t>UI Policy = because the tool’s main purpose is to make fields required, read-only, or mandatory, and it does that job well without needing any code </a:t>
+            </a:r>
+          </a:p>
+        </p:txBody>
+      </p:sp>
+      <p:sp>
+        <p:nvSpPr>
+          <p:cNvPr id="4" name="Slide Number Placeholder 3">
+            <a:extLst>
+              <a:ext uri="{FF2B5EF4-FFF2-40B4-BE49-F238E27FC236}">
+                <a16:creationId xmlns:a16="http://schemas.microsoft.com/office/drawing/2014/main" id="{2C6FFD5C-EC90-16A1-72D0-877CE6B4015F}"/>
+              </a:ext>
+            </a:extLst>
+          </p:cNvPr>
+          <p:cNvSpPr>
+            <a:spLocks noGrp="1"/>
+          </p:cNvSpPr>
+          <p:nvPr>
+            <p:ph type="sldNum" sz="quarter" idx="5"/>
+          </p:nvPr>
+        </p:nvSpPr>
+        <p:spPr/>
+        <p:txBody>
+          <a:bodyPr/>
+          <a:lstStyle/>
+          <a:p>
+            <a:fld id="{36C040E7-12E1-4E9C-B024-3505840C3DA3}" type="slidenum">
+              <a:rPr lang="en-US" smtClean="0"/>
+              <a:t>27</a:t>
+            </a:fld>
+            <a:endParaRPr lang="en-US"/>
+          </a:p>
+        </p:txBody>
+      </p:sp>
+    </p:spTree>
+    <p:extLst>
+      <p:ext uri="{BB962C8B-B14F-4D97-AF65-F5344CB8AC3E}">
+        <p14:creationId xmlns:p14="http://schemas.microsoft.com/office/powerpoint/2010/main" val="1640425886"/>
       </p:ext>
     </p:extLst>
   </p:cSld>
@@ -8189,6 +8302,693 @@
     <p:extLst>
       <p:ext uri="{BB962C8B-B14F-4D97-AF65-F5344CB8AC3E}">
         <p14:creationId xmlns:p14="http://schemas.microsoft.com/office/powerpoint/2010/main" val="512930782"/>
+      </p:ext>
+    </p:extLst>
+  </p:cSld>
+  <p:clrMapOvr>
+    <a:masterClrMapping/>
+  </p:clrMapOvr>
+</p:sld>
+</file>
+
+<file path=ppt/slides/slide26.xml><?xml version="1.0" encoding="utf-8"?>
+<p:sld xmlns:a="http://schemas.openxmlformats.org/drawingml/2006/main" xmlns:r="http://schemas.openxmlformats.org/officeDocument/2006/relationships" xmlns:p="http://schemas.openxmlformats.org/presentationml/2006/main">
+  <p:cSld>
+    <p:spTree>
+      <p:nvGrpSpPr>
+        <p:cNvPr id="1" name=""/>
+        <p:cNvGrpSpPr/>
+        <p:nvPr/>
+      </p:nvGrpSpPr>
+      <p:grpSpPr>
+        <a:xfrm>
+          <a:off x="0" y="0"/>
+          <a:ext cx="0" cy="0"/>
+          <a:chOff x="0" y="0"/>
+          <a:chExt cx="0" cy="0"/>
+        </a:xfrm>
+      </p:grpSpPr>
+      <p:sp>
+        <p:nvSpPr>
+          <p:cNvPr id="2" name="Title 1">
+            <a:extLst>
+              <a:ext uri="{FF2B5EF4-FFF2-40B4-BE49-F238E27FC236}">
+                <a16:creationId xmlns:a16="http://schemas.microsoft.com/office/drawing/2014/main" id="{7F1071B5-D643-0F8E-0D2D-FFE777A5EB78}"/>
+              </a:ext>
+            </a:extLst>
+          </p:cNvPr>
+          <p:cNvSpPr>
+            <a:spLocks noGrp="1"/>
+          </p:cNvSpPr>
+          <p:nvPr>
+            <p:ph type="title"/>
+          </p:nvPr>
+        </p:nvSpPr>
+        <p:spPr/>
+        <p:txBody>
+          <a:bodyPr/>
+          <a:lstStyle/>
+          <a:p>
+            <a:r>
+              <a:rPr lang="en-US" dirty="0" err="1"/>
+              <a:t>IntegrationHub</a:t>
+            </a:r>
+            <a:r>
+              <a:rPr lang="en-US" dirty="0"/>
+              <a:t> (Flow Designer)</a:t>
+            </a:r>
+          </a:p>
+        </p:txBody>
+      </p:sp>
+      <p:pic>
+        <p:nvPicPr>
+          <p:cNvPr id="5" name="Content Placeholder 4">
+            <a:extLst>
+              <a:ext uri="{FF2B5EF4-FFF2-40B4-BE49-F238E27FC236}">
+                <a16:creationId xmlns:a16="http://schemas.microsoft.com/office/drawing/2014/main" id="{75B720F3-602D-C98D-F1D9-29DAC7112415}"/>
+              </a:ext>
+            </a:extLst>
+          </p:cNvPr>
+          <p:cNvPicPr>
+            <a:picLocks noGrp="1" noChangeAspect="1"/>
+          </p:cNvPicPr>
+          <p:nvPr>
+            <p:ph idx="1"/>
+          </p:nvPr>
+        </p:nvPicPr>
+        <p:blipFill>
+          <a:blip r:embed="rId2"/>
+          <a:stretch>
+            <a:fillRect/>
+          </a:stretch>
+        </p:blipFill>
+        <p:spPr>
+          <a:xfrm>
+            <a:off x="497514" y="3467268"/>
+            <a:ext cx="5829300" cy="2688576"/>
+          </a:xfrm>
+          <a:prstGeom prst="rect">
+            <a:avLst/>
+          </a:prstGeom>
+        </p:spPr>
+      </p:pic>
+      <p:pic>
+        <p:nvPicPr>
+          <p:cNvPr id="7" name="Picture 6">
+            <a:extLst>
+              <a:ext uri="{FF2B5EF4-FFF2-40B4-BE49-F238E27FC236}">
+                <a16:creationId xmlns:a16="http://schemas.microsoft.com/office/drawing/2014/main" id="{80E669B4-23F7-3981-8554-DCE4BDB2C321}"/>
+              </a:ext>
+            </a:extLst>
+          </p:cNvPr>
+          <p:cNvPicPr>
+            <a:picLocks noChangeAspect="1"/>
+          </p:cNvPicPr>
+          <p:nvPr/>
+        </p:nvPicPr>
+        <p:blipFill>
+          <a:blip r:embed="rId3"/>
+          <a:stretch>
+            <a:fillRect/>
+          </a:stretch>
+        </p:blipFill>
+        <p:spPr>
+          <a:xfrm>
+            <a:off x="6607042" y="3790782"/>
+            <a:ext cx="4929998" cy="981930"/>
+          </a:xfrm>
+          <a:prstGeom prst="rect">
+            <a:avLst/>
+          </a:prstGeom>
+        </p:spPr>
+      </p:pic>
+      <p:pic>
+        <p:nvPicPr>
+          <p:cNvPr id="9" name="Picture 8">
+            <a:extLst>
+              <a:ext uri="{FF2B5EF4-FFF2-40B4-BE49-F238E27FC236}">
+                <a16:creationId xmlns:a16="http://schemas.microsoft.com/office/drawing/2014/main" id="{37AD003A-70CD-4144-A860-A368921181C5}"/>
+              </a:ext>
+            </a:extLst>
+          </p:cNvPr>
+          <p:cNvPicPr>
+            <a:picLocks noChangeAspect="1"/>
+          </p:cNvPicPr>
+          <p:nvPr/>
+        </p:nvPicPr>
+        <p:blipFill>
+          <a:blip r:embed="rId4"/>
+          <a:stretch>
+            <a:fillRect/>
+          </a:stretch>
+        </p:blipFill>
+        <p:spPr>
+          <a:xfrm>
+            <a:off x="6607042" y="4968147"/>
+            <a:ext cx="5077534" cy="1333686"/>
+          </a:xfrm>
+          <a:prstGeom prst="rect">
+            <a:avLst/>
+          </a:prstGeom>
+        </p:spPr>
+      </p:pic>
+      <p:sp>
+        <p:nvSpPr>
+          <p:cNvPr id="10" name="TextBox 9">
+            <a:extLst>
+              <a:ext uri="{FF2B5EF4-FFF2-40B4-BE49-F238E27FC236}">
+                <a16:creationId xmlns:a16="http://schemas.microsoft.com/office/drawing/2014/main" id="{4A858E04-21F3-E51C-81E3-AC75F49C7073}"/>
+              </a:ext>
+            </a:extLst>
+          </p:cNvPr>
+          <p:cNvSpPr txBox="1"/>
+          <p:nvPr/>
+        </p:nvSpPr>
+        <p:spPr>
+          <a:xfrm>
+            <a:off x="6607042" y="3204210"/>
+            <a:ext cx="1250663" cy="369332"/>
+          </a:xfrm>
+          <a:prstGeom prst="rect">
+            <a:avLst/>
+          </a:prstGeom>
+          <a:noFill/>
+        </p:spPr>
+        <p:txBody>
+          <a:bodyPr wrap="none" rtlCol="0">
+            <a:spAutoFit/>
+          </a:bodyPr>
+          <a:lstStyle/>
+          <a:p>
+            <a:r>
+              <a:rPr lang="en-US" dirty="0"/>
+              <a:t>Script Step:</a:t>
+            </a:r>
+          </a:p>
+        </p:txBody>
+      </p:sp>
+      <p:sp>
+        <p:nvSpPr>
+          <p:cNvPr id="11" name="TextBox 10">
+            <a:extLst>
+              <a:ext uri="{FF2B5EF4-FFF2-40B4-BE49-F238E27FC236}">
+                <a16:creationId xmlns:a16="http://schemas.microsoft.com/office/drawing/2014/main" id="{464D0038-6EC2-100F-05F6-1981D673E3F3}"/>
+              </a:ext>
+            </a:extLst>
+          </p:cNvPr>
+          <p:cNvSpPr txBox="1"/>
+          <p:nvPr/>
+        </p:nvSpPr>
+        <p:spPr>
+          <a:xfrm>
+            <a:off x="733592" y="3204210"/>
+            <a:ext cx="1124026" cy="369332"/>
+          </a:xfrm>
+          <a:prstGeom prst="rect">
+            <a:avLst/>
+          </a:prstGeom>
+          <a:noFill/>
+        </p:spPr>
+        <p:txBody>
+          <a:bodyPr wrap="none" rtlCol="0">
+            <a:spAutoFit/>
+          </a:bodyPr>
+          <a:lstStyle/>
+          <a:p>
+            <a:r>
+              <a:rPr lang="en-US" dirty="0"/>
+              <a:t>Rest Step:</a:t>
+            </a:r>
+          </a:p>
+        </p:txBody>
+      </p:sp>
+      <p:sp>
+        <p:nvSpPr>
+          <p:cNvPr id="12" name="TextBox 11">
+            <a:extLst>
+              <a:ext uri="{FF2B5EF4-FFF2-40B4-BE49-F238E27FC236}">
+                <a16:creationId xmlns:a16="http://schemas.microsoft.com/office/drawing/2014/main" id="{9C943660-0A94-5F8A-64DC-09AA7C36DB0A}"/>
+              </a:ext>
+            </a:extLst>
+          </p:cNvPr>
+          <p:cNvSpPr txBox="1"/>
+          <p:nvPr/>
+        </p:nvSpPr>
+        <p:spPr>
+          <a:xfrm>
+            <a:off x="2950216" y="2063640"/>
+            <a:ext cx="7021987" cy="923330"/>
+          </a:xfrm>
+          <a:prstGeom prst="rect">
+            <a:avLst/>
+          </a:prstGeom>
+          <a:noFill/>
+        </p:spPr>
+        <p:txBody>
+          <a:bodyPr wrap="none" rtlCol="0">
+            <a:spAutoFit/>
+          </a:bodyPr>
+          <a:lstStyle/>
+          <a:p>
+            <a:pPr marL="285750" indent="-285750">
+              <a:buClr>
+                <a:schemeClr val="accent2"/>
+              </a:buClr>
+              <a:buFont typeface="Wingdings" panose="05000000000000000000" pitchFamily="2" charset="2"/>
+              <a:buChar char="§"/>
+            </a:pPr>
+            <a:r>
+              <a:rPr lang="en-US" dirty="0"/>
+              <a:t>Rest actions let us make callouts to APIs (note this is a custom action)</a:t>
+            </a:r>
+          </a:p>
+          <a:p>
+            <a:pPr marL="285750" indent="-285750">
+              <a:buClr>
+                <a:schemeClr val="accent2"/>
+              </a:buClr>
+              <a:buFont typeface="Wingdings" panose="05000000000000000000" pitchFamily="2" charset="2"/>
+              <a:buChar char="§"/>
+            </a:pPr>
+            <a:r>
+              <a:rPr lang="en-US" dirty="0"/>
+              <a:t>We can then use a script step to take in the response as an input</a:t>
+            </a:r>
+          </a:p>
+          <a:p>
+            <a:pPr marL="285750" indent="-285750">
+              <a:buClr>
+                <a:schemeClr val="accent2"/>
+              </a:buClr>
+              <a:buFont typeface="Wingdings" panose="05000000000000000000" pitchFamily="2" charset="2"/>
+              <a:buChar char="§"/>
+            </a:pPr>
+            <a:r>
+              <a:rPr lang="en-US" dirty="0"/>
+              <a:t>Outputs are then defined and will be returned from the Script Step</a:t>
+            </a:r>
+          </a:p>
+        </p:txBody>
+      </p:sp>
+    </p:spTree>
+    <p:extLst>
+      <p:ext uri="{BB962C8B-B14F-4D97-AF65-F5344CB8AC3E}">
+        <p14:creationId xmlns:p14="http://schemas.microsoft.com/office/powerpoint/2010/main" val="980257202"/>
+      </p:ext>
+    </p:extLst>
+  </p:cSld>
+  <p:clrMapOvr>
+    <a:masterClrMapping/>
+  </p:clrMapOvr>
+</p:sld>
+</file>
+
+<file path=ppt/slides/slide27.xml><?xml version="1.0" encoding="utf-8"?>
+<p:sld xmlns:a="http://schemas.openxmlformats.org/drawingml/2006/main" xmlns:r="http://schemas.openxmlformats.org/officeDocument/2006/relationships" xmlns:p="http://schemas.openxmlformats.org/presentationml/2006/main">
+  <p:cSld>
+    <p:spTree>
+      <p:nvGrpSpPr>
+        <p:cNvPr id="1" name="">
+          <a:extLst>
+            <a:ext uri="{FF2B5EF4-FFF2-40B4-BE49-F238E27FC236}">
+              <a16:creationId xmlns:a16="http://schemas.microsoft.com/office/drawing/2014/main" id="{045DBCAB-6AC5-4ED0-FB60-1FC0B9D0B2EF}"/>
+            </a:ext>
+          </a:extLst>
+        </p:cNvPr>
+        <p:cNvGrpSpPr/>
+        <p:nvPr/>
+      </p:nvGrpSpPr>
+      <p:grpSpPr>
+        <a:xfrm>
+          <a:off x="0" y="0"/>
+          <a:ext cx="0" cy="0"/>
+          <a:chOff x="0" y="0"/>
+          <a:chExt cx="0" cy="0"/>
+        </a:xfrm>
+      </p:grpSpPr>
+      <p:sp>
+        <p:nvSpPr>
+          <p:cNvPr id="2" name="Title 1">
+            <a:extLst>
+              <a:ext uri="{FF2B5EF4-FFF2-40B4-BE49-F238E27FC236}">
+                <a16:creationId xmlns:a16="http://schemas.microsoft.com/office/drawing/2014/main" id="{406DB2AA-EDBA-601C-D37B-84A2133CD177}"/>
+              </a:ext>
+            </a:extLst>
+          </p:cNvPr>
+          <p:cNvSpPr>
+            <a:spLocks noGrp="1"/>
+          </p:cNvSpPr>
+          <p:nvPr>
+            <p:ph type="title"/>
+          </p:nvPr>
+        </p:nvSpPr>
+        <p:spPr/>
+        <p:txBody>
+          <a:bodyPr/>
+          <a:lstStyle/>
+          <a:p>
+            <a:r>
+              <a:rPr lang="en-US" dirty="0"/>
+              <a:t>Challenge</a:t>
+            </a:r>
+          </a:p>
+        </p:txBody>
+      </p:sp>
+      <p:sp>
+        <p:nvSpPr>
+          <p:cNvPr id="3" name="Content Placeholder 2">
+            <a:extLst>
+              <a:ext uri="{FF2B5EF4-FFF2-40B4-BE49-F238E27FC236}">
+                <a16:creationId xmlns:a16="http://schemas.microsoft.com/office/drawing/2014/main" id="{75CFE271-7137-5712-18ED-64E5CB0209CB}"/>
+              </a:ext>
+            </a:extLst>
+          </p:cNvPr>
+          <p:cNvSpPr>
+            <a:spLocks noGrp="1"/>
+          </p:cNvSpPr>
+          <p:nvPr>
+            <p:ph idx="1"/>
+          </p:nvPr>
+        </p:nvSpPr>
+        <p:spPr>
+          <a:xfrm>
+            <a:off x="6418730" y="2388698"/>
+            <a:ext cx="5192079" cy="3280582"/>
+          </a:xfrm>
+        </p:spPr>
+        <p:txBody>
+          <a:bodyPr>
+            <a:normAutofit/>
+          </a:bodyPr>
+          <a:lstStyle/>
+          <a:p>
+            <a:pPr marL="0" indent="0">
+              <a:buNone/>
+            </a:pPr>
+            <a:r>
+              <a:rPr lang="en-US" b="1" dirty="0"/>
+              <a:t>Scenario: </a:t>
+            </a:r>
+          </a:p>
+          <a:p>
+            <a:pPr marL="305435" indent="-305435"/>
+            <a:r>
+              <a:rPr lang="en-US" dirty="0">
+                <a:ea typeface="+mn-lt"/>
+                <a:cs typeface="+mn-lt"/>
+              </a:rPr>
+              <a:t>After a new user is created we should do the following:</a:t>
+            </a:r>
+          </a:p>
+          <a:p>
+            <a:pPr marL="305435" indent="-305435"/>
+            <a:r>
+              <a:rPr lang="en-US" dirty="0">
+                <a:ea typeface="+mn-lt"/>
+                <a:cs typeface="+mn-lt"/>
+              </a:rPr>
+              <a:t>Execute a flow that will set a new text field on </a:t>
+            </a:r>
+            <a:r>
+              <a:rPr lang="en-US" dirty="0" err="1">
+                <a:ea typeface="+mn-lt"/>
+                <a:cs typeface="+mn-lt"/>
+              </a:rPr>
+              <a:t>sys_user</a:t>
+            </a:r>
+            <a:r>
+              <a:rPr lang="en-US" dirty="0">
+                <a:ea typeface="+mn-lt"/>
+                <a:cs typeface="+mn-lt"/>
+              </a:rPr>
+              <a:t>: Astrology Info</a:t>
+            </a:r>
+          </a:p>
+          <a:p>
+            <a:pPr marL="305435" indent="-305435"/>
+            <a:r>
+              <a:rPr lang="en-US" dirty="0">
+                <a:ea typeface="+mn-lt"/>
+                <a:cs typeface="+mn-lt"/>
+              </a:rPr>
+              <a:t>Our flow should use a public API to get astrology info about the user – use a birthday field to determine their sign</a:t>
+            </a:r>
+          </a:p>
+        </p:txBody>
+      </p:sp>
+      <p:sp>
+        <p:nvSpPr>
+          <p:cNvPr id="4" name="Content Placeholder 2">
+            <a:extLst>
+              <a:ext uri="{FF2B5EF4-FFF2-40B4-BE49-F238E27FC236}">
+                <a16:creationId xmlns:a16="http://schemas.microsoft.com/office/drawing/2014/main" id="{E51F42EA-4815-BE31-25BB-AAE3E5C0BE68}"/>
+              </a:ext>
+            </a:extLst>
+          </p:cNvPr>
+          <p:cNvSpPr txBox="1">
+            <a:spLocks/>
+          </p:cNvSpPr>
+          <p:nvPr/>
+        </p:nvSpPr>
+        <p:spPr>
+          <a:xfrm>
+            <a:off x="903921" y="2262799"/>
+            <a:ext cx="4869350" cy="1484448"/>
+          </a:xfrm>
+          <a:prstGeom prst="rect">
+            <a:avLst/>
+          </a:prstGeom>
+        </p:spPr>
+        <p:txBody>
+          <a:bodyPr vert="horz" lIns="91440" tIns="45720" rIns="91440" bIns="45720" rtlCol="0" anchor="ctr">
+            <a:normAutofit/>
+          </a:bodyPr>
+          <a:lstStyle>
+            <a:lvl1pPr marL="306000" indent="-306000" algn="l" defTabSz="457200" rtl="0" eaLnBrk="1" latinLnBrk="0" hangingPunct="1">
+              <a:spcBef>
+                <a:spcPct val="20000"/>
+              </a:spcBef>
+              <a:spcAft>
+                <a:spcPts val="600"/>
+              </a:spcAft>
+              <a:buClr>
+                <a:schemeClr val="accent2"/>
+              </a:buClr>
+              <a:buSzPct val="92000"/>
+              <a:buFont typeface="Wingdings 2" panose="05020102010507070707" pitchFamily="18" charset="2"/>
+              <a:buChar char=""/>
+              <a:defRPr sz="1800" kern="1200">
+                <a:solidFill>
+                  <a:schemeClr val="tx2"/>
+                </a:solidFill>
+                <a:latin typeface="+mn-lt"/>
+                <a:ea typeface="+mn-ea"/>
+                <a:cs typeface="+mn-cs"/>
+              </a:defRPr>
+            </a:lvl1pPr>
+            <a:lvl2pPr marL="630000" indent="-306000" algn="l" defTabSz="457200" rtl="0" eaLnBrk="1" latinLnBrk="0" hangingPunct="1">
+              <a:spcBef>
+                <a:spcPct val="20000"/>
+              </a:spcBef>
+              <a:spcAft>
+                <a:spcPts val="600"/>
+              </a:spcAft>
+              <a:buClr>
+                <a:schemeClr val="accent2"/>
+              </a:buClr>
+              <a:buSzPct val="92000"/>
+              <a:buFont typeface="Wingdings 2" panose="05020102010507070707" pitchFamily="18" charset="2"/>
+              <a:buChar char=""/>
+              <a:defRPr sz="1600" kern="1200">
+                <a:solidFill>
+                  <a:schemeClr val="tx2"/>
+                </a:solidFill>
+                <a:latin typeface="+mn-lt"/>
+                <a:ea typeface="+mn-ea"/>
+                <a:cs typeface="+mn-cs"/>
+              </a:defRPr>
+            </a:lvl2pPr>
+            <a:lvl3pPr marL="900000" indent="-270000" algn="l" defTabSz="457200" rtl="0" eaLnBrk="1" latinLnBrk="0" hangingPunct="1">
+              <a:spcBef>
+                <a:spcPct val="20000"/>
+              </a:spcBef>
+              <a:spcAft>
+                <a:spcPts val="600"/>
+              </a:spcAft>
+              <a:buClr>
+                <a:schemeClr val="accent2"/>
+              </a:buClr>
+              <a:buSzPct val="92000"/>
+              <a:buFont typeface="Wingdings 2" panose="05020102010507070707" pitchFamily="18" charset="2"/>
+              <a:buChar char=""/>
+              <a:defRPr sz="1400" kern="1200">
+                <a:solidFill>
+                  <a:schemeClr val="tx2"/>
+                </a:solidFill>
+                <a:latin typeface="+mn-lt"/>
+                <a:ea typeface="+mn-ea"/>
+                <a:cs typeface="+mn-cs"/>
+              </a:defRPr>
+            </a:lvl3pPr>
+            <a:lvl4pPr marL="1242000" indent="-234000" algn="l" defTabSz="457200" rtl="0" eaLnBrk="1" latinLnBrk="0" hangingPunct="1">
+              <a:spcBef>
+                <a:spcPct val="20000"/>
+              </a:spcBef>
+              <a:spcAft>
+                <a:spcPts val="600"/>
+              </a:spcAft>
+              <a:buClr>
+                <a:schemeClr val="accent2"/>
+              </a:buClr>
+              <a:buSzPct val="92000"/>
+              <a:buFont typeface="Wingdings 2" panose="05020102010507070707" pitchFamily="18" charset="2"/>
+              <a:buChar char=""/>
+              <a:defRPr sz="1200" kern="1200">
+                <a:solidFill>
+                  <a:schemeClr val="tx2"/>
+                </a:solidFill>
+                <a:latin typeface="+mn-lt"/>
+                <a:ea typeface="+mn-ea"/>
+                <a:cs typeface="+mn-cs"/>
+              </a:defRPr>
+            </a:lvl4pPr>
+            <a:lvl5pPr marL="1602000" indent="-234000" algn="l" defTabSz="457200" rtl="0" eaLnBrk="1" latinLnBrk="0" hangingPunct="1">
+              <a:spcBef>
+                <a:spcPct val="20000"/>
+              </a:spcBef>
+              <a:spcAft>
+                <a:spcPts val="600"/>
+              </a:spcAft>
+              <a:buClr>
+                <a:schemeClr val="accent2"/>
+              </a:buClr>
+              <a:buSzPct val="92000"/>
+              <a:buFont typeface="Wingdings 2" panose="05020102010507070707" pitchFamily="18" charset="2"/>
+              <a:buChar char=""/>
+              <a:defRPr sz="1200" kern="1200">
+                <a:solidFill>
+                  <a:schemeClr val="tx2"/>
+                </a:solidFill>
+                <a:latin typeface="+mn-lt"/>
+                <a:ea typeface="+mn-ea"/>
+                <a:cs typeface="+mn-cs"/>
+              </a:defRPr>
+            </a:lvl5pPr>
+            <a:lvl6pPr marL="1900000" indent="-228600" algn="l" defTabSz="457200" rtl="0" eaLnBrk="1" latinLnBrk="0" hangingPunct="1">
+              <a:spcBef>
+                <a:spcPct val="20000"/>
+              </a:spcBef>
+              <a:spcAft>
+                <a:spcPts val="600"/>
+              </a:spcAft>
+              <a:buClr>
+                <a:schemeClr val="accent2"/>
+              </a:buClr>
+              <a:buSzPct val="92000"/>
+              <a:buFont typeface="Wingdings 2" panose="05020102010507070707" pitchFamily="18" charset="2"/>
+              <a:buChar char=""/>
+              <a:defRPr sz="1200" kern="1200">
+                <a:solidFill>
+                  <a:schemeClr val="tx2"/>
+                </a:solidFill>
+                <a:latin typeface="+mn-lt"/>
+                <a:ea typeface="+mn-ea"/>
+                <a:cs typeface="+mn-cs"/>
+              </a:defRPr>
+            </a:lvl6pPr>
+            <a:lvl7pPr marL="2200000" indent="-228600" algn="l" defTabSz="457200" rtl="0" eaLnBrk="1" latinLnBrk="0" hangingPunct="1">
+              <a:spcBef>
+                <a:spcPct val="20000"/>
+              </a:spcBef>
+              <a:spcAft>
+                <a:spcPts val="600"/>
+              </a:spcAft>
+              <a:buClr>
+                <a:schemeClr val="accent2"/>
+              </a:buClr>
+              <a:buSzPct val="92000"/>
+              <a:buFont typeface="Wingdings 2" panose="05020102010507070707" pitchFamily="18" charset="2"/>
+              <a:buChar char=""/>
+              <a:defRPr sz="1200" kern="1200">
+                <a:solidFill>
+                  <a:schemeClr val="tx2"/>
+                </a:solidFill>
+                <a:latin typeface="+mn-lt"/>
+                <a:ea typeface="+mn-ea"/>
+                <a:cs typeface="+mn-cs"/>
+              </a:defRPr>
+            </a:lvl7pPr>
+            <a:lvl8pPr marL="2500000" indent="-228600" algn="l" defTabSz="457200" rtl="0" eaLnBrk="1" latinLnBrk="0" hangingPunct="1">
+              <a:spcBef>
+                <a:spcPct val="20000"/>
+              </a:spcBef>
+              <a:spcAft>
+                <a:spcPts val="600"/>
+              </a:spcAft>
+              <a:buClr>
+                <a:schemeClr val="accent2"/>
+              </a:buClr>
+              <a:buSzPct val="92000"/>
+              <a:buFont typeface="Wingdings 2" panose="05020102010507070707" pitchFamily="18" charset="2"/>
+              <a:buChar char=""/>
+              <a:defRPr sz="1200" kern="1200">
+                <a:solidFill>
+                  <a:schemeClr val="tx2"/>
+                </a:solidFill>
+                <a:latin typeface="+mn-lt"/>
+                <a:ea typeface="+mn-ea"/>
+                <a:cs typeface="+mn-cs"/>
+              </a:defRPr>
+            </a:lvl8pPr>
+            <a:lvl9pPr marL="2800000" indent="-228600" algn="l" defTabSz="457200" rtl="0" eaLnBrk="1" latinLnBrk="0" hangingPunct="1">
+              <a:spcBef>
+                <a:spcPct val="20000"/>
+              </a:spcBef>
+              <a:spcAft>
+                <a:spcPts val="600"/>
+              </a:spcAft>
+              <a:buClr>
+                <a:schemeClr val="accent2"/>
+              </a:buClr>
+              <a:buSzPct val="92000"/>
+              <a:buFont typeface="Wingdings 2" panose="05020102010507070707" pitchFamily="18" charset="2"/>
+              <a:buChar char=""/>
+              <a:defRPr sz="1200" kern="1200">
+                <a:solidFill>
+                  <a:schemeClr val="tx2"/>
+                </a:solidFill>
+                <a:latin typeface="+mn-lt"/>
+                <a:ea typeface="+mn-ea"/>
+                <a:cs typeface="+mn-cs"/>
+              </a:defRPr>
+            </a:lvl9pPr>
+          </a:lstStyle>
+          <a:p>
+            <a:pPr marL="0" indent="0">
+              <a:buFont typeface="Wingdings 2" panose="05020102010507070707" pitchFamily="18" charset="2"/>
+              <a:buNone/>
+            </a:pPr>
+            <a:r>
+              <a:rPr lang="en-US" b="1" dirty="0"/>
+              <a:t>Goal: </a:t>
+            </a:r>
+          </a:p>
+          <a:p>
+            <a:pPr marL="305435" indent="-305435"/>
+            <a:r>
+              <a:rPr lang="en-US" dirty="0">
+                <a:ea typeface="+mn-lt"/>
+                <a:cs typeface="+mn-lt"/>
+              </a:rPr>
+              <a:t>Create a Flow that calls an API</a:t>
+            </a:r>
+          </a:p>
+        </p:txBody>
+      </p:sp>
+    </p:spTree>
+    <p:extLst>
+      <p:ext uri="{BB962C8B-B14F-4D97-AF65-F5344CB8AC3E}">
+        <p14:creationId xmlns:p14="http://schemas.microsoft.com/office/powerpoint/2010/main" val="1705289296"/>
       </p:ext>
     </p:extLst>
   </p:cSld>
